--- a/public/fun/pack/pptx/family/가족소개_12_아이와함께_아카시아길.pptx
+++ b/public/fun/pack/pptx/family/가족소개_12_아이와함께_아카시아길.pptx
@@ -3347,7 +3347,7 @@
             <a:r>
               <a:rPr sz="3600" b="1" i="0">
                 <a:solidFill>
-                  <a:srgbClr val="49562E"/>
+                  <a:srgbClr val="526728"/>
                 </a:solidFill>
               </a:rPr>
               <a:t>우리 가족을 소개합니다</a:t>
@@ -3385,7 +3385,7 @@
             <a:r>
               <a:rPr sz="1700" b="0" i="1">
                 <a:solidFill>
-                  <a:srgbClr val="49562E"/>
+                  <a:srgbClr val="526728"/>
                 </a:solidFill>
               </a:rPr>
               <a:t>아카시아 꽃 따 먹던 아이들</a:t>
@@ -3445,7 +3445,7 @@
     <p:bg>
       <p:bgPr>
         <a:solidFill>
-          <a:srgbClr val="F6F8F2"/>
+          <a:srgbClr val="F9FCF3"/>
         </a:solidFill>
         <a:effectLst/>
       </p:bgPr>
@@ -3472,7 +3472,7 @@
             <a:avLst/>
           </a:prstGeom>
           <a:solidFill>
-            <a:srgbClr val="E4EBD6"/>
+            <a:srgbClr val="EBF7D4"/>
           </a:solidFill>
           <a:ln>
             <a:noFill/>
@@ -3501,7 +3501,7 @@
             <a:avLst/>
           </a:prstGeom>
           <a:solidFill>
-            <a:srgbClr val="819852"/>
+            <a:srgbClr val="9DBF5A"/>
           </a:solidFill>
           <a:ln>
             <a:noFill/>
@@ -3545,7 +3545,7 @@
             <a:r>
               <a:rPr sz="3000" b="1" i="0">
                 <a:solidFill>
-                  <a:srgbClr val="49562E"/>
+                  <a:srgbClr val="526728"/>
                 </a:solidFill>
               </a:rPr>
               <a:t>가족 구성원</a:t>
@@ -3568,11 +3568,11 @@
             <a:avLst/>
           </a:prstGeom>
           <a:solidFill>
-            <a:srgbClr val="E4EBD6"/>
+            <a:srgbClr val="EBF7D4"/>
           </a:solidFill>
           <a:ln w="19050">
             <a:solidFill>
-              <a:srgbClr val="819852"/>
+              <a:srgbClr val="9DBF5A"/>
             </a:solidFill>
             <a:prstDash val="dash"/>
           </a:ln>
@@ -3591,7 +3591,7 @@
             <a:r>
               <a:rPr sz="1200" b="0" i="0">
                 <a:solidFill>
-                  <a:srgbClr val="49562E"/>
+                  <a:srgbClr val="526728"/>
                 </a:solidFill>
               </a:rPr>
               <a:t>사진</a:t>
@@ -3629,7 +3629,7 @@
             <a:r>
               <a:rPr sz="1600" b="1" i="0">
                 <a:solidFill>
-                  <a:srgbClr val="49562E"/>
+                  <a:srgbClr val="526728"/>
                 </a:solidFill>
               </a:rPr>
               <a:t>아빠</a:t>
@@ -3720,11 +3720,11 @@
             <a:avLst/>
           </a:prstGeom>
           <a:solidFill>
-            <a:srgbClr val="E4EBD6"/>
+            <a:srgbClr val="EBF7D4"/>
           </a:solidFill>
           <a:ln w="19050">
             <a:solidFill>
-              <a:srgbClr val="819852"/>
+              <a:srgbClr val="9DBF5A"/>
             </a:solidFill>
             <a:prstDash val="dash"/>
           </a:ln>
@@ -3743,7 +3743,7 @@
             <a:r>
               <a:rPr sz="1200" b="0" i="0">
                 <a:solidFill>
-                  <a:srgbClr val="49562E"/>
+                  <a:srgbClr val="526728"/>
                 </a:solidFill>
               </a:rPr>
               <a:t>사진</a:t>
@@ -3781,7 +3781,7 @@
             <a:r>
               <a:rPr sz="1600" b="1" i="0">
                 <a:solidFill>
-                  <a:srgbClr val="49562E"/>
+                  <a:srgbClr val="526728"/>
                 </a:solidFill>
               </a:rPr>
               <a:t>엄마</a:t>
@@ -3872,11 +3872,11 @@
             <a:avLst/>
           </a:prstGeom>
           <a:solidFill>
-            <a:srgbClr val="E4EBD6"/>
+            <a:srgbClr val="EBF7D4"/>
           </a:solidFill>
           <a:ln w="19050">
             <a:solidFill>
-              <a:srgbClr val="819852"/>
+              <a:srgbClr val="9DBF5A"/>
             </a:solidFill>
             <a:prstDash val="dash"/>
           </a:ln>
@@ -3895,7 +3895,7 @@
             <a:r>
               <a:rPr sz="1200" b="0" i="0">
                 <a:solidFill>
-                  <a:srgbClr val="49562E"/>
+                  <a:srgbClr val="526728"/>
                 </a:solidFill>
               </a:rPr>
               <a:t>사진</a:t>
@@ -3933,7 +3933,7 @@
             <a:r>
               <a:rPr sz="1600" b="1" i="0">
                 <a:solidFill>
-                  <a:srgbClr val="49562E"/>
+                  <a:srgbClr val="526728"/>
                 </a:solidFill>
               </a:rPr>
               <a:t>첫째</a:t>
@@ -4024,11 +4024,11 @@
             <a:avLst/>
           </a:prstGeom>
           <a:solidFill>
-            <a:srgbClr val="E4EBD6"/>
+            <a:srgbClr val="EBF7D4"/>
           </a:solidFill>
           <a:ln w="19050">
             <a:solidFill>
-              <a:srgbClr val="819852"/>
+              <a:srgbClr val="9DBF5A"/>
             </a:solidFill>
             <a:prstDash val="dash"/>
           </a:ln>
@@ -4047,7 +4047,7 @@
             <a:r>
               <a:rPr sz="1200" b="0" i="0">
                 <a:solidFill>
-                  <a:srgbClr val="49562E"/>
+                  <a:srgbClr val="526728"/>
                 </a:solidFill>
               </a:rPr>
               <a:t>사진</a:t>
@@ -4085,7 +4085,7 @@
             <a:r>
               <a:rPr sz="1600" b="1" i="0">
                 <a:solidFill>
-                  <a:srgbClr val="49562E"/>
+                  <a:srgbClr val="526728"/>
                 </a:solidFill>
               </a:rPr>
               <a:t>둘째</a:t>
@@ -4175,7 +4175,7 @@
     <p:bg>
       <p:bgPr>
         <a:solidFill>
-          <a:srgbClr val="F6F8F2"/>
+          <a:srgbClr val="F9FCF3"/>
         </a:solidFill>
         <a:effectLst/>
       </p:bgPr>
@@ -4202,7 +4202,7 @@
             <a:avLst/>
           </a:prstGeom>
           <a:solidFill>
-            <a:srgbClr val="E4EBD6"/>
+            <a:srgbClr val="EBF7D4"/>
           </a:solidFill>
           <a:ln>
             <a:noFill/>
@@ -4231,7 +4231,7 @@
             <a:avLst/>
           </a:prstGeom>
           <a:solidFill>
-            <a:srgbClr val="819852"/>
+            <a:srgbClr val="9DBF5A"/>
           </a:solidFill>
           <a:ln>
             <a:noFill/>
@@ -4275,7 +4275,7 @@
             <a:r>
               <a:rPr sz="3000" b="1" i="0">
                 <a:solidFill>
-                  <a:srgbClr val="49562E"/>
+                  <a:srgbClr val="526728"/>
                 </a:solidFill>
               </a:rPr>
               <a:t>우리 가족 이야기</a:t>
@@ -4298,7 +4298,7 @@
             <a:avLst/>
           </a:prstGeom>
           <a:solidFill>
-            <a:srgbClr val="E4EBD6"/>
+            <a:srgbClr val="EBF7D4"/>
           </a:solidFill>
           <a:ln>
             <a:noFill/>
@@ -4327,7 +4327,7 @@
             <a:avLst/>
           </a:prstGeom>
           <a:solidFill>
-            <a:srgbClr val="819852"/>
+            <a:srgbClr val="9DBF5A"/>
           </a:solidFill>
           <a:ln w="38100">
             <a:solidFill>
@@ -4373,7 +4373,7 @@
             <a:r>
               <a:rPr sz="1600" b="1" i="0">
                 <a:solidFill>
-                  <a:srgbClr val="819852"/>
+                  <a:srgbClr val="9DBF5A"/>
                 </a:solidFill>
               </a:rPr>
               <a:t>가족이 된 날</a:t>
@@ -4411,7 +4411,7 @@
             <a:r>
               <a:rPr sz="1800" b="1" i="0">
                 <a:solidFill>
-                  <a:srgbClr val="49562E"/>
+                  <a:srgbClr val="526728"/>
                 </a:solidFill>
               </a:rPr>
               <a:t>우리의 시작</a:t>
@@ -4472,7 +4472,7 @@
             <a:avLst/>
           </a:prstGeom>
           <a:solidFill>
-            <a:srgbClr val="819852"/>
+            <a:srgbClr val="9DBF5A"/>
           </a:solidFill>
           <a:ln w="38100">
             <a:solidFill>
@@ -4518,7 +4518,7 @@
             <a:r>
               <a:rPr sz="1600" b="1" i="0">
                 <a:solidFill>
-                  <a:srgbClr val="819852"/>
+                  <a:srgbClr val="9DBF5A"/>
                 </a:solidFill>
               </a:rPr>
               <a:t>아이가 태어난 날</a:t>
@@ -4556,7 +4556,7 @@
             <a:r>
               <a:rPr sz="1800" b="1" i="0">
                 <a:solidFill>
-                  <a:srgbClr val="49562E"/>
+                  <a:srgbClr val="526728"/>
                 </a:solidFill>
               </a:rPr>
               <a:t>새 식구</a:t>
@@ -4617,7 +4617,7 @@
             <a:avLst/>
           </a:prstGeom>
           <a:solidFill>
-            <a:srgbClr val="819852"/>
+            <a:srgbClr val="9DBF5A"/>
           </a:solidFill>
           <a:ln w="38100">
             <a:solidFill>
@@ -4663,7 +4663,7 @@
             <a:r>
               <a:rPr sz="1600" b="1" i="0">
                 <a:solidFill>
-                  <a:srgbClr val="819852"/>
+                  <a:srgbClr val="9DBF5A"/>
                 </a:solidFill>
               </a:rPr>
               <a:t>첫 가족 여행</a:t>
@@ -4701,7 +4701,7 @@
             <a:r>
               <a:rPr sz="1800" b="1" i="0">
                 <a:solidFill>
-                  <a:srgbClr val="49562E"/>
+                  <a:srgbClr val="526728"/>
                 </a:solidFill>
               </a:rPr>
               <a:t>함께 떠난 길</a:t>
@@ -4762,7 +4762,7 @@
             <a:avLst/>
           </a:prstGeom>
           <a:solidFill>
-            <a:srgbClr val="819852"/>
+            <a:srgbClr val="9DBF5A"/>
           </a:solidFill>
           <a:ln w="38100">
             <a:solidFill>
@@ -4808,7 +4808,7 @@
             <a:r>
               <a:rPr sz="1600" b="1" i="0">
                 <a:solidFill>
-                  <a:srgbClr val="819852"/>
+                  <a:srgbClr val="9DBF5A"/>
                 </a:solidFill>
               </a:rPr>
               <a:t>지금</a:t>
@@ -4846,7 +4846,7 @@
             <a:r>
               <a:rPr sz="1800" b="1" i="0">
                 <a:solidFill>
-                  <a:srgbClr val="49562E"/>
+                  <a:srgbClr val="526728"/>
                 </a:solidFill>
               </a:rPr>
               <a:t>오늘의 우리</a:t>
@@ -4906,7 +4906,7 @@
     <p:bg>
       <p:bgPr>
         <a:solidFill>
-          <a:srgbClr val="F6F8F2"/>
+          <a:srgbClr val="F9FCF3"/>
         </a:solidFill>
         <a:effectLst/>
       </p:bgPr>
@@ -4933,7 +4933,7 @@
             <a:avLst/>
           </a:prstGeom>
           <a:solidFill>
-            <a:srgbClr val="E4EBD6"/>
+            <a:srgbClr val="EBF7D4"/>
           </a:solidFill>
           <a:ln>
             <a:noFill/>
@@ -4962,7 +4962,7 @@
             <a:avLst/>
           </a:prstGeom>
           <a:solidFill>
-            <a:srgbClr val="819852"/>
+            <a:srgbClr val="9DBF5A"/>
           </a:solidFill>
           <a:ln>
             <a:noFill/>
@@ -5006,7 +5006,7 @@
             <a:r>
               <a:rPr sz="3000" b="1" i="0">
                 <a:solidFill>
-                  <a:srgbClr val="49562E"/>
+                  <a:srgbClr val="526728"/>
                 </a:solidFill>
               </a:rPr>
               <a:t>우리 가족의 약속</a:t>
@@ -5031,11 +5031,11 @@
             </a:avLst>
           </a:prstGeom>
           <a:solidFill>
-            <a:srgbClr val="F6F8F2"/>
+            <a:srgbClr val="F9FCF3"/>
           </a:solidFill>
           <a:ln w="12700">
             <a:solidFill>
-              <a:srgbClr val="E4EBD6"/>
+              <a:srgbClr val="EBF7D4"/>
             </a:solidFill>
           </a:ln>
         </p:spPr>
@@ -5062,7 +5062,7 @@
             <a:avLst/>
           </a:prstGeom>
           <a:solidFill>
-            <a:srgbClr val="819852"/>
+            <a:srgbClr val="9DBF5A"/>
           </a:solidFill>
           <a:ln>
             <a:noFill/>
@@ -5120,7 +5120,7 @@
             <a:r>
               <a:rPr sz="1800" b="1" i="0">
                 <a:solidFill>
-                  <a:srgbClr val="49562E"/>
+                  <a:srgbClr val="526728"/>
                 </a:solidFill>
               </a:rPr>
               <a:t>약속 1</a:t>
@@ -5183,11 +5183,11 @@
             </a:avLst>
           </a:prstGeom>
           <a:solidFill>
-            <a:srgbClr val="F6F8F2"/>
+            <a:srgbClr val="F9FCF3"/>
           </a:solidFill>
           <a:ln w="12700">
             <a:solidFill>
-              <a:srgbClr val="E4EBD6"/>
+              <a:srgbClr val="EBF7D4"/>
             </a:solidFill>
           </a:ln>
         </p:spPr>
@@ -5214,7 +5214,7 @@
             <a:avLst/>
           </a:prstGeom>
           <a:solidFill>
-            <a:srgbClr val="819852"/>
+            <a:srgbClr val="9DBF5A"/>
           </a:solidFill>
           <a:ln>
             <a:noFill/>
@@ -5272,7 +5272,7 @@
             <a:r>
               <a:rPr sz="1800" b="1" i="0">
                 <a:solidFill>
-                  <a:srgbClr val="49562E"/>
+                  <a:srgbClr val="526728"/>
                 </a:solidFill>
               </a:rPr>
               <a:t>약속 2</a:t>
@@ -5335,11 +5335,11 @@
             </a:avLst>
           </a:prstGeom>
           <a:solidFill>
-            <a:srgbClr val="F6F8F2"/>
+            <a:srgbClr val="F9FCF3"/>
           </a:solidFill>
           <a:ln w="12700">
             <a:solidFill>
-              <a:srgbClr val="E4EBD6"/>
+              <a:srgbClr val="EBF7D4"/>
             </a:solidFill>
           </a:ln>
         </p:spPr>
@@ -5366,7 +5366,7 @@
             <a:avLst/>
           </a:prstGeom>
           <a:solidFill>
-            <a:srgbClr val="819852"/>
+            <a:srgbClr val="9DBF5A"/>
           </a:solidFill>
           <a:ln>
             <a:noFill/>
@@ -5424,7 +5424,7 @@
             <a:r>
               <a:rPr sz="1800" b="1" i="0">
                 <a:solidFill>
-                  <a:srgbClr val="49562E"/>
+                  <a:srgbClr val="526728"/>
                 </a:solidFill>
               </a:rPr>
               <a:t>약속 3</a:t>
@@ -5484,7 +5484,7 @@
     <p:bg>
       <p:bgPr>
         <a:solidFill>
-          <a:srgbClr val="F6F8F2"/>
+          <a:srgbClr val="F9FCF3"/>
         </a:solidFill>
         <a:effectLst/>
       </p:bgPr>
@@ -5511,7 +5511,7 @@
             <a:avLst/>
           </a:prstGeom>
           <a:solidFill>
-            <a:srgbClr val="E4EBD6"/>
+            <a:srgbClr val="EBF7D4"/>
           </a:solidFill>
           <a:ln>
             <a:noFill/>
@@ -5540,7 +5540,7 @@
             <a:avLst/>
           </a:prstGeom>
           <a:solidFill>
-            <a:srgbClr val="819852"/>
+            <a:srgbClr val="9DBF5A"/>
           </a:solidFill>
           <a:ln>
             <a:noFill/>
@@ -5584,7 +5584,7 @@
             <a:r>
               <a:rPr sz="3000" b="1" i="0">
                 <a:solidFill>
-                  <a:srgbClr val="49562E"/>
+                  <a:srgbClr val="526728"/>
                 </a:solidFill>
               </a:rPr>
               <a:t>가족 사진</a:t>
@@ -5609,11 +5609,11 @@
             </a:avLst>
           </a:prstGeom>
           <a:solidFill>
-            <a:srgbClr val="E4EBD6"/>
+            <a:srgbClr val="EBF7D4"/>
           </a:solidFill>
           <a:ln w="19050">
             <a:solidFill>
-              <a:srgbClr val="819852"/>
+              <a:srgbClr val="9DBF5A"/>
             </a:solidFill>
             <a:prstDash val="dash"/>
           </a:ln>
@@ -5632,7 +5632,7 @@
             <a:r>
               <a:rPr sz="1200" b="0" i="0">
                 <a:solidFill>
-                  <a:srgbClr val="49562E"/>
+                  <a:srgbClr val="526728"/>
                 </a:solidFill>
               </a:rPr>
               <a:t>사진 1</a:t>
@@ -5657,11 +5657,11 @@
             </a:avLst>
           </a:prstGeom>
           <a:solidFill>
-            <a:srgbClr val="E4EBD6"/>
+            <a:srgbClr val="EBF7D4"/>
           </a:solidFill>
           <a:ln w="19050">
             <a:solidFill>
-              <a:srgbClr val="819852"/>
+              <a:srgbClr val="9DBF5A"/>
             </a:solidFill>
             <a:prstDash val="dash"/>
           </a:ln>
@@ -5680,7 +5680,7 @@
             <a:r>
               <a:rPr sz="1200" b="0" i="0">
                 <a:solidFill>
-                  <a:srgbClr val="49562E"/>
+                  <a:srgbClr val="526728"/>
                 </a:solidFill>
               </a:rPr>
               <a:t>사진 2</a:t>
@@ -5705,11 +5705,11 @@
             </a:avLst>
           </a:prstGeom>
           <a:solidFill>
-            <a:srgbClr val="E4EBD6"/>
+            <a:srgbClr val="EBF7D4"/>
           </a:solidFill>
           <a:ln w="19050">
             <a:solidFill>
-              <a:srgbClr val="819852"/>
+              <a:srgbClr val="9DBF5A"/>
             </a:solidFill>
             <a:prstDash val="dash"/>
           </a:ln>
@@ -5728,7 +5728,7 @@
             <a:r>
               <a:rPr sz="1200" b="0" i="0">
                 <a:solidFill>
-                  <a:srgbClr val="49562E"/>
+                  <a:srgbClr val="526728"/>
                 </a:solidFill>
               </a:rPr>
               <a:t>사진 3</a:t>
@@ -5753,11 +5753,11 @@
             </a:avLst>
           </a:prstGeom>
           <a:solidFill>
-            <a:srgbClr val="E4EBD6"/>
+            <a:srgbClr val="EBF7D4"/>
           </a:solidFill>
           <a:ln w="19050">
             <a:solidFill>
-              <a:srgbClr val="819852"/>
+              <a:srgbClr val="9DBF5A"/>
             </a:solidFill>
             <a:prstDash val="dash"/>
           </a:ln>
@@ -5776,7 +5776,7 @@
             <a:r>
               <a:rPr sz="1200" b="0" i="0">
                 <a:solidFill>
-                  <a:srgbClr val="49562E"/>
+                  <a:srgbClr val="526728"/>
                 </a:solidFill>
               </a:rPr>
               <a:t>사진 4</a:t>
@@ -5801,11 +5801,11 @@
             </a:avLst>
           </a:prstGeom>
           <a:solidFill>
-            <a:srgbClr val="E4EBD6"/>
+            <a:srgbClr val="EBF7D4"/>
           </a:solidFill>
           <a:ln w="19050">
             <a:solidFill>
-              <a:srgbClr val="819852"/>
+              <a:srgbClr val="9DBF5A"/>
             </a:solidFill>
             <a:prstDash val="dash"/>
           </a:ln>
@@ -5824,7 +5824,7 @@
             <a:r>
               <a:rPr sz="1200" b="0" i="0">
                 <a:solidFill>
-                  <a:srgbClr val="49562E"/>
+                  <a:srgbClr val="526728"/>
                 </a:solidFill>
               </a:rPr>
               <a:t>사진 5</a:t>
@@ -5849,11 +5849,11 @@
             </a:avLst>
           </a:prstGeom>
           <a:solidFill>
-            <a:srgbClr val="E4EBD6"/>
+            <a:srgbClr val="EBF7D4"/>
           </a:solidFill>
           <a:ln w="19050">
             <a:solidFill>
-              <a:srgbClr val="819852"/>
+              <a:srgbClr val="9DBF5A"/>
             </a:solidFill>
             <a:prstDash val="dash"/>
           </a:ln>
@@ -5872,7 +5872,7 @@
             <a:r>
               <a:rPr sz="1200" b="0" i="0">
                 <a:solidFill>
-                  <a:srgbClr val="49562E"/>
+                  <a:srgbClr val="526728"/>
                 </a:solidFill>
               </a:rPr>
               <a:t>사진 6</a:t>
@@ -5952,7 +5952,7 @@
             <a:r>
               <a:rPr sz="3600" b="1" i="0">
                 <a:solidFill>
-                  <a:srgbClr val="49562E"/>
+                  <a:srgbClr val="526728"/>
                 </a:solidFill>
               </a:rPr>
               <a:t>우리 가족 소개를 마칩니다</a:t>
@@ -5990,7 +5990,7 @@
             <a:r>
               <a:rPr sz="1700" b="0" i="1">
                 <a:solidFill>
-                  <a:srgbClr val="49562E"/>
+                  <a:srgbClr val="526728"/>
                 </a:solidFill>
               </a:rPr>
               <a:t>읽어 주셔서 고맙습니다</a:t>
@@ -6055,34 +6055,34 @@
         <a:sysClr val="window" lastClr="FFFFFF"/>
       </a:lt1>
       <a:dk2>
-        <a:srgbClr val="49562E"/>
+        <a:srgbClr val="526728"/>
       </a:dk2>
       <a:lt2>
-        <a:srgbClr val="F6F8F2"/>
+        <a:srgbClr val="F9FCF3"/>
       </a:lt2>
       <a:accent1>
-        <a:srgbClr val="819852"/>
+        <a:srgbClr val="9DBF5A"/>
       </a:accent1>
       <a:accent2>
-        <a:srgbClr val="475285"/>
+        <a:srgbClr val="339941"/>
       </a:accent2>
       <a:accent3>
-        <a:srgbClr val="49562E"/>
+        <a:srgbClr val="526728"/>
       </a:accent3>
       <a:accent4>
-        <a:srgbClr val="E4EBD6"/>
+        <a:srgbClr val="EBF7D4"/>
       </a:accent4>
       <a:accent5>
-        <a:srgbClr val="64756C"/>
+        <a:srgbClr val="68AC4E"/>
       </a:accent5>
       <a:accent6>
-        <a:srgbClr val="929A82"/>
+        <a:srgbClr val="97A47E"/>
       </a:accent6>
       <a:hlink>
-        <a:srgbClr val="819852"/>
+        <a:srgbClr val="9DBF5A"/>
       </a:hlink>
       <a:folHlink>
-        <a:srgbClr val="49562E"/>
+        <a:srgbClr val="526728"/>
       </a:folHlink>
     </a:clrScheme>
     <a:fontScheme name="Office">

--- a/public/fun/pack/pptx/family/가족소개_12_아이와함께_아카시아길.pptx
+++ b/public/fun/pack/pptx/family/가족소개_12_아이와함께_아카시아길.pptx
@@ -3286,6 +3286,14 @@
 <file path=ppt/slides/slide1.xml><?xml version="1.0" encoding="utf-8"?>
 <p:sld xmlns:a="http://schemas.openxmlformats.org/drawingml/2006/main" xmlns:p="http://schemas.openxmlformats.org/presentationml/2006/main" xmlns:r="http://schemas.openxmlformats.org/officeDocument/2006/relationships">
   <p:cSld>
+    <p:bg>
+      <p:bgPr>
+        <a:solidFill>
+          <a:srgbClr val="F7FDEA"/>
+        </a:solidFill>
+        <a:effectLst/>
+      </p:bgPr>
+    </p:bg>
     <p:spTree>
       <p:nvGrpSpPr>
         <p:cNvPr id="1" name=""/>
@@ -3293,30 +3301,116 @@
         <p:nvPr/>
       </p:nvGrpSpPr>
       <p:grpSpPr/>
-      <p:pic>
-        <p:nvPicPr>
-          <p:cNvPr id="3" name="표지 그림" descr="family-12.jpg"/>
-          <p:cNvPicPr>
-            <a:picLocks noChangeAspect="1"/>
-          </p:cNvPicPr>
-          <p:nvPr/>
-        </p:nvPicPr>
-        <p:blipFill>
-          <a:blip r:embed="rId2"/>
-          <a:stretch>
-            <a:fillRect/>
-          </a:stretch>
-        </p:blipFill>
-        <p:spPr>
-          <a:xfrm>
-            <a:off x="0" y="0"/>
-            <a:ext cx="12191695" cy="6858000"/>
+      <p:sp>
+        <p:nvSpPr>
+          <p:cNvPr id="3" name="사진 자리"/>
+          <p:cNvSpPr/>
+          <p:nvPr/>
+        </p:nvSpPr>
+        <p:spPr>
+          <a:xfrm>
+            <a:off x="7802684" y="0"/>
+            <a:ext cx="4389010" cy="6858000"/>
           </a:xfrm>
           <a:prstGeom prst="rect">
             <a:avLst/>
           </a:prstGeom>
-        </p:spPr>
-      </p:pic>
+          <a:solidFill>
+            <a:srgbClr val="D9F2A6"/>
+          </a:solidFill>
+          <a:ln>
+            <a:noFill/>
+          </a:ln>
+        </p:spPr>
+        <p:txBody>
+          <a:bodyPr rtlCol="0" anchor="ctr" wrap="square" lIns="54864" rIns="54864" tIns="27432" bIns="27432">
+            <a:noAutofit/>
+          </a:bodyPr>
+          <a:lstStyle/>
+          <a:p>
+            <a:pPr algn="ctr">
+              <a:lnSpc>
+                <a:spcPct val="100000"/>
+              </a:lnSpc>
+            </a:pPr>
+            <a:r>
+              <a:rPr sz="1400" b="0" i="0">
+                <a:solidFill>
+                  <a:srgbClr val="3E4927"/>
+                </a:solidFill>
+              </a:rPr>
+              <a:t>사진을 넣어 주세요</a:t>
+            </a:r>
+          </a:p>
+        </p:txBody>
+      </p:sp>
+      <p:sp>
+        <p:nvSpPr>
+          <p:cNvPr id="4" name="장식"/>
+          <p:cNvSpPr/>
+          <p:nvPr/>
+        </p:nvSpPr>
+        <p:spPr>
+          <a:xfrm>
+            <a:off x="8168435" y="365760"/>
+            <a:ext cx="3657508" cy="6126480"/>
+          </a:xfrm>
+          <a:prstGeom prst="rect">
+            <a:avLst/>
+          </a:prstGeom>
+          <a:noFill/>
+          <a:ln w="9525">
+            <a:solidFill>
+              <a:srgbClr val="26231F"/>
+            </a:solidFill>
+          </a:ln>
+        </p:spPr>
+        <p:txBody>
+          <a:bodyPr rtlCol="0" anchor="ctr"/>
+          <a:lstStyle/>
+          <a:p>
+            <a:pPr algn="ctr"/>
+          </a:p>
+        </p:txBody>
+      </p:sp>
+      <p:sp>
+        <p:nvSpPr>
+          <p:cNvPr id="5" name="라벨"/>
+          <p:cNvSpPr txBox="1"/>
+          <p:nvPr/>
+        </p:nvSpPr>
+        <p:spPr>
+          <a:xfrm>
+            <a:off x="822960" y="2148840"/>
+            <a:ext cx="5608179" cy="274320"/>
+          </a:xfrm>
+          <a:prstGeom prst="rect">
+            <a:avLst/>
+          </a:prstGeom>
+          <a:noFill/>
+        </p:spPr>
+        <p:txBody>
+          <a:bodyPr wrap="square" lIns="54864" rIns="54864" tIns="27432" bIns="27432" anchor="t">
+            <a:noAutofit/>
+          </a:bodyPr>
+          <a:lstStyle/>
+          <a:p>
+            <a:pPr algn="l">
+              <a:lnSpc>
+                <a:spcPct val="115000"/>
+              </a:lnSpc>
+            </a:pPr>
+            <a:r>
+              <a:rPr sz="1000" b="1" i="0" spc="250">
+                <a:solidFill>
+                  <a:srgbClr val="26231F"/>
+                </a:solidFill>
+              </a:rPr>
+              <a:t>FAMILY ALBUM</a:t>
+            </a:r>
+          </a:p>
+        </p:txBody>
+      </p:sp>
       <p:sp>
         <p:nvSpPr>
           <p:cNvPr id="2" name="Title 1"/>
@@ -3329,8 +3423,8 @@
         </p:nvSpPr>
         <p:spPr>
           <a:xfrm>
-            <a:off x="853418" y="2057400"/>
-            <a:ext cx="6095847" cy="1554480"/>
+            <a:off x="822960" y="2606040"/>
+            <a:ext cx="5608179" cy="1188720"/>
           </a:xfrm>
         </p:spPr>
         <p:txBody>
@@ -3345,9 +3439,9 @@
               </a:lnSpc>
             </a:pPr>
             <a:r>
-              <a:rPr sz="3600" b="1" i="0">
-                <a:solidFill>
-                  <a:srgbClr val="526728"/>
+              <a:rPr sz="4000" b="1" i="0">
+                <a:solidFill>
+                  <a:srgbClr val="26231F"/>
                 </a:solidFill>
               </a:rPr>
               <a:t>우리 가족을 소개합니다</a:t>
@@ -3357,14 +3451,14 @@
       </p:sp>
       <p:sp>
         <p:nvSpPr>
-          <p:cNvPr id="4" name="한 줄 문구"/>
+          <p:cNvPr id="6" name="한 줄 문구"/>
           <p:cNvSpPr txBox="1"/>
           <p:nvPr/>
         </p:nvSpPr>
         <p:spPr>
           <a:xfrm>
-            <a:off x="853418" y="3749039"/>
-            <a:ext cx="6095847" cy="822960"/>
+            <a:off x="822960" y="3886200"/>
+            <a:ext cx="5608179" cy="822960"/>
           </a:xfrm>
           <a:prstGeom prst="rect">
             <a:avLst/>
@@ -3383,9 +3477,9 @@
               </a:lnSpc>
             </a:pPr>
             <a:r>
-              <a:rPr sz="1700" b="0" i="1">
-                <a:solidFill>
-                  <a:srgbClr val="526728"/>
+              <a:rPr sz="1700" b="0" i="0">
+                <a:solidFill>
+                  <a:srgbClr val="26231F"/>
                 </a:solidFill>
               </a:rPr>
               <a:t>아카시아 꽃 따 먹던 아이들</a:t>
@@ -3395,14 +3489,14 @@
       </p:sp>
       <p:sp>
         <p:nvSpPr>
-          <p:cNvPr id="5" name="안내 문구"/>
+          <p:cNvPr id="7" name="안내 문구"/>
           <p:cNvSpPr txBox="1"/>
           <p:nvPr/>
         </p:nvSpPr>
         <p:spPr>
           <a:xfrm>
-            <a:off x="853418" y="4617720"/>
-            <a:ext cx="6095847" cy="914400"/>
+            <a:off x="822960" y="4754880"/>
+            <a:ext cx="5608179" cy="914400"/>
           </a:xfrm>
           <a:prstGeom prst="rect">
             <a:avLst/>
@@ -3423,10 +3517,10 @@
             <a:r>
               <a:rPr sz="1400" b="0" i="0">
                 <a:solidFill>
-                  <a:srgbClr val="666666"/>
+                  <a:srgbClr val="26231F"/>
                 </a:solidFill>
               </a:rPr>
-              <a:t>아이와 함께 · 2027. 00. 00</a:t>
+              <a:t>아이와 함께 · 날짜 입력</a:t>
             </a:r>
           </a:p>
         </p:txBody>
@@ -3445,7 +3539,7 @@
     <p:bg>
       <p:bgPr>
         <a:solidFill>
-          <a:srgbClr val="F9FCF3"/>
+          <a:srgbClr val="FCFDFA"/>
         </a:solidFill>
         <a:effectLst/>
       </p:bgPr>
@@ -3465,14 +3559,14 @@
         </p:nvSpPr>
         <p:spPr>
           <a:xfrm>
-            <a:off x="0" y="6035040"/>
-            <a:ext cx="1737360" cy="822960"/>
-          </a:xfrm>
-          <a:prstGeom prst="rtTriangle">
+            <a:off x="640080" y="6400800"/>
+            <a:ext cx="10911535" cy="10972"/>
+          </a:xfrm>
+          <a:prstGeom prst="rect">
             <a:avLst/>
           </a:prstGeom>
           <a:solidFill>
-            <a:srgbClr val="EBF7D4"/>
+            <a:srgbClr val="26231F"/>
           </a:solidFill>
           <a:ln>
             <a:noFill/>
@@ -3488,20 +3582,58 @@
       </p:sp>
       <p:sp>
         <p:nvSpPr>
-          <p:cNvPr id="4" name="장식"/>
+          <p:cNvPr id="4" name="하단 라벨"/>
+          <p:cNvSpPr txBox="1"/>
+          <p:nvPr/>
+        </p:nvSpPr>
+        <p:spPr>
+          <a:xfrm>
+            <a:off x="640080" y="6437376"/>
+            <a:ext cx="5486400" cy="274320"/>
+          </a:xfrm>
+          <a:prstGeom prst="rect">
+            <a:avLst/>
+          </a:prstGeom>
+          <a:noFill/>
+        </p:spPr>
+        <p:txBody>
+          <a:bodyPr wrap="square" lIns="54864" rIns="54864" tIns="27432" bIns="27432" anchor="ctr">
+            <a:noAutofit/>
+          </a:bodyPr>
+          <a:lstStyle/>
+          <a:p>
+            <a:pPr algn="l">
+              <a:lnSpc>
+                <a:spcPct val="115000"/>
+              </a:lnSpc>
+            </a:pPr>
+            <a:r>
+              <a:rPr sz="900" b="1" i="0" spc="250">
+                <a:solidFill>
+                  <a:srgbClr val="26231F"/>
+                </a:solidFill>
+              </a:rPr>
+              <a:t>FAMILY ALBUM</a:t>
+            </a:r>
+          </a:p>
+        </p:txBody>
+      </p:sp>
+      <p:sp>
+        <p:nvSpPr>
+          <p:cNvPr id="5" name="포인트"/>
           <p:cNvSpPr/>
           <p:nvPr/>
         </p:nvSpPr>
         <p:spPr>
           <a:xfrm>
-            <a:off x="0" y="6400800"/>
-            <a:ext cx="914400" cy="457200"/>
-          </a:xfrm>
-          <a:prstGeom prst="rtTriangle">
+            <a:off x="11213287" y="6473952"/>
+            <a:ext cx="219456" cy="219456"/>
+          </a:xfrm>
+          <a:prstGeom prst="ellipse">
             <a:avLst/>
           </a:prstGeom>
           <a:solidFill>
-            <a:srgbClr val="9DBF5A"/>
+            <a:srgbClr val="D0ED97"/>
           </a:solidFill>
           <a:ln>
             <a:noFill/>
@@ -3527,8 +3659,8 @@
         </p:nvSpPr>
         <p:spPr>
           <a:xfrm>
-            <a:off x="640080" y="457200"/>
-            <a:ext cx="9722815" cy="868680"/>
+            <a:off x="640080" y="502920"/>
+            <a:ext cx="10911535" cy="914400"/>
           </a:xfrm>
         </p:spPr>
         <p:txBody>
@@ -3545,7 +3677,7 @@
             <a:r>
               <a:rPr sz="3000" b="1" i="0">
                 <a:solidFill>
-                  <a:srgbClr val="526728"/>
+                  <a:srgbClr val="26231F"/>
                 </a:solidFill>
               </a:rPr>
               <a:t>가족 구성원</a:t>
@@ -3555,7 +3687,7 @@
       </p:sp>
       <p:sp>
         <p:nvSpPr>
-          <p:cNvPr id="5" name="사진 자리"/>
+          <p:cNvPr id="6" name="사진 자리"/>
           <p:cNvSpPr/>
           <p:nvPr/>
         </p:nvSpPr>
@@ -3568,12 +3700,10 @@
             <a:avLst/>
           </a:prstGeom>
           <a:solidFill>
-            <a:srgbClr val="EBF7D4"/>
+            <a:srgbClr val="ECFAD1"/>
           </a:solidFill>
           <a:ln w="19050">
-            <a:solidFill>
-              <a:srgbClr val="9DBF5A"/>
-            </a:solidFill>
+            <a:noFill/>
             <a:prstDash val="dash"/>
           </a:ln>
         </p:spPr>
@@ -3591,7 +3721,7 @@
             <a:r>
               <a:rPr sz="1200" b="0" i="0">
                 <a:solidFill>
-                  <a:srgbClr val="526728"/>
+                  <a:srgbClr val="8E8780"/>
                 </a:solidFill>
               </a:rPr>
               <a:t>사진</a:t>
@@ -3601,7 +3731,7 @@
       </p:sp>
       <p:sp>
         <p:nvSpPr>
-          <p:cNvPr id="6" name="TextBox 5"/>
+          <p:cNvPr id="7" name="TextBox 6"/>
           <p:cNvSpPr txBox="1"/>
           <p:nvPr/>
         </p:nvSpPr>
@@ -3629,7 +3759,7 @@
             <a:r>
               <a:rPr sz="1600" b="1" i="0">
                 <a:solidFill>
-                  <a:srgbClr val="526728"/>
+                  <a:srgbClr val="3E4927"/>
                 </a:solidFill>
               </a:rPr>
               <a:t>아빠</a:t>
@@ -3639,14 +3769,14 @@
       </p:sp>
       <p:sp>
         <p:nvSpPr>
-          <p:cNvPr id="7" name="TextBox 6"/>
+          <p:cNvPr id="8" name="TextBox 7"/>
           <p:cNvSpPr txBox="1"/>
           <p:nvPr/>
         </p:nvSpPr>
         <p:spPr>
           <a:xfrm>
             <a:off x="731519" y="4430953"/>
-            <a:ext cx="2373553" cy="1969846"/>
+            <a:ext cx="2373553" cy="1741246"/>
           </a:xfrm>
           <a:prstGeom prst="rect">
             <a:avLst/>
@@ -3707,7 +3837,7 @@
       </p:sp>
       <p:sp>
         <p:nvSpPr>
-          <p:cNvPr id="8" name="사진 자리"/>
+          <p:cNvPr id="9" name="사진 자리"/>
           <p:cNvSpPr/>
           <p:nvPr/>
         </p:nvSpPr>
@@ -3720,12 +3850,10 @@
             <a:avLst/>
           </a:prstGeom>
           <a:solidFill>
-            <a:srgbClr val="EBF7D4"/>
+            <a:srgbClr val="ECFAD1"/>
           </a:solidFill>
           <a:ln w="19050">
-            <a:solidFill>
-              <a:srgbClr val="9DBF5A"/>
-            </a:solidFill>
+            <a:noFill/>
             <a:prstDash val="dash"/>
           </a:ln>
         </p:spPr>
@@ -3743,7 +3871,7 @@
             <a:r>
               <a:rPr sz="1200" b="0" i="0">
                 <a:solidFill>
-                  <a:srgbClr val="526728"/>
+                  <a:srgbClr val="8E8780"/>
                 </a:solidFill>
               </a:rPr>
               <a:t>사진</a:t>
@@ -3753,7 +3881,7 @@
       </p:sp>
       <p:sp>
         <p:nvSpPr>
-          <p:cNvPr id="9" name="TextBox 8"/>
+          <p:cNvPr id="10" name="TextBox 9"/>
           <p:cNvSpPr txBox="1"/>
           <p:nvPr/>
         </p:nvSpPr>
@@ -3781,7 +3909,7 @@
             <a:r>
               <a:rPr sz="1600" b="1" i="0">
                 <a:solidFill>
-                  <a:srgbClr val="526728"/>
+                  <a:srgbClr val="3E4927"/>
                 </a:solidFill>
               </a:rPr>
               <a:t>엄마</a:t>
@@ -3791,14 +3919,14 @@
       </p:sp>
       <p:sp>
         <p:nvSpPr>
-          <p:cNvPr id="10" name="TextBox 9"/>
+          <p:cNvPr id="11" name="TextBox 10"/>
           <p:cNvSpPr txBox="1"/>
           <p:nvPr/>
         </p:nvSpPr>
         <p:spPr>
           <a:xfrm>
             <a:off x="3516553" y="4430953"/>
-            <a:ext cx="2373553" cy="1969846"/>
+            <a:ext cx="2373553" cy="1741246"/>
           </a:xfrm>
           <a:prstGeom prst="rect">
             <a:avLst/>
@@ -3859,7 +3987,7 @@
       </p:sp>
       <p:sp>
         <p:nvSpPr>
-          <p:cNvPr id="11" name="사진 자리"/>
+          <p:cNvPr id="12" name="사진 자리"/>
           <p:cNvSpPr/>
           <p:nvPr/>
         </p:nvSpPr>
@@ -3872,12 +4000,10 @@
             <a:avLst/>
           </a:prstGeom>
           <a:solidFill>
-            <a:srgbClr val="EBF7D4"/>
+            <a:srgbClr val="ECFAD1"/>
           </a:solidFill>
           <a:ln w="19050">
-            <a:solidFill>
-              <a:srgbClr val="9DBF5A"/>
-            </a:solidFill>
+            <a:noFill/>
             <a:prstDash val="dash"/>
           </a:ln>
         </p:spPr>
@@ -3895,7 +4021,7 @@
             <a:r>
               <a:rPr sz="1200" b="0" i="0">
                 <a:solidFill>
-                  <a:srgbClr val="526728"/>
+                  <a:srgbClr val="8E8780"/>
                 </a:solidFill>
               </a:rPr>
               <a:t>사진</a:t>
@@ -3905,7 +4031,7 @@
       </p:sp>
       <p:sp>
         <p:nvSpPr>
-          <p:cNvPr id="12" name="TextBox 11"/>
+          <p:cNvPr id="13" name="TextBox 12"/>
           <p:cNvSpPr txBox="1"/>
           <p:nvPr/>
         </p:nvSpPr>
@@ -3933,7 +4059,7 @@
             <a:r>
               <a:rPr sz="1600" b="1" i="0">
                 <a:solidFill>
-                  <a:srgbClr val="526728"/>
+                  <a:srgbClr val="3E4927"/>
                 </a:solidFill>
               </a:rPr>
               <a:t>첫째</a:t>
@@ -3943,14 +4069,14 @@
       </p:sp>
       <p:sp>
         <p:nvSpPr>
-          <p:cNvPr id="13" name="TextBox 12"/>
+          <p:cNvPr id="14" name="TextBox 13"/>
           <p:cNvSpPr txBox="1"/>
           <p:nvPr/>
         </p:nvSpPr>
         <p:spPr>
           <a:xfrm>
             <a:off x="6301587" y="4430953"/>
-            <a:ext cx="2373553" cy="1969846"/>
+            <a:ext cx="2373553" cy="1741246"/>
           </a:xfrm>
           <a:prstGeom prst="rect">
             <a:avLst/>
@@ -4011,7 +4137,7 @@
       </p:sp>
       <p:sp>
         <p:nvSpPr>
-          <p:cNvPr id="14" name="사진 자리"/>
+          <p:cNvPr id="15" name="사진 자리"/>
           <p:cNvSpPr/>
           <p:nvPr/>
         </p:nvSpPr>
@@ -4024,12 +4150,10 @@
             <a:avLst/>
           </a:prstGeom>
           <a:solidFill>
-            <a:srgbClr val="EBF7D4"/>
+            <a:srgbClr val="ECFAD1"/>
           </a:solidFill>
           <a:ln w="19050">
-            <a:solidFill>
-              <a:srgbClr val="9DBF5A"/>
-            </a:solidFill>
+            <a:noFill/>
             <a:prstDash val="dash"/>
           </a:ln>
         </p:spPr>
@@ -4047,7 +4171,7 @@
             <a:r>
               <a:rPr sz="1200" b="0" i="0">
                 <a:solidFill>
-                  <a:srgbClr val="526728"/>
+                  <a:srgbClr val="8E8780"/>
                 </a:solidFill>
               </a:rPr>
               <a:t>사진</a:t>
@@ -4057,7 +4181,7 @@
       </p:sp>
       <p:sp>
         <p:nvSpPr>
-          <p:cNvPr id="15" name="TextBox 14"/>
+          <p:cNvPr id="16" name="TextBox 15"/>
           <p:cNvSpPr txBox="1"/>
           <p:nvPr/>
         </p:nvSpPr>
@@ -4085,7 +4209,7 @@
             <a:r>
               <a:rPr sz="1600" b="1" i="0">
                 <a:solidFill>
-                  <a:srgbClr val="526728"/>
+                  <a:srgbClr val="3E4927"/>
                 </a:solidFill>
               </a:rPr>
               <a:t>둘째</a:t>
@@ -4095,14 +4219,14 @@
       </p:sp>
       <p:sp>
         <p:nvSpPr>
-          <p:cNvPr id="16" name="TextBox 15"/>
+          <p:cNvPr id="17" name="TextBox 16"/>
           <p:cNvSpPr txBox="1"/>
           <p:nvPr/>
         </p:nvSpPr>
         <p:spPr>
           <a:xfrm>
             <a:off x="9086621" y="4430953"/>
-            <a:ext cx="2373553" cy="1969846"/>
+            <a:ext cx="2373553" cy="1741246"/>
           </a:xfrm>
           <a:prstGeom prst="rect">
             <a:avLst/>
@@ -4175,7 +4299,7 @@
     <p:bg>
       <p:bgPr>
         <a:solidFill>
-          <a:srgbClr val="F9FCF3"/>
+          <a:srgbClr val="FCFDFA"/>
         </a:solidFill>
         <a:effectLst/>
       </p:bgPr>
@@ -4195,14 +4319,14 @@
         </p:nvSpPr>
         <p:spPr>
           <a:xfrm>
-            <a:off x="0" y="6035040"/>
-            <a:ext cx="1737360" cy="822960"/>
-          </a:xfrm>
-          <a:prstGeom prst="rtTriangle">
+            <a:off x="640080" y="6400800"/>
+            <a:ext cx="10911535" cy="10972"/>
+          </a:xfrm>
+          <a:prstGeom prst="rect">
             <a:avLst/>
           </a:prstGeom>
           <a:solidFill>
-            <a:srgbClr val="EBF7D4"/>
+            <a:srgbClr val="26231F"/>
           </a:solidFill>
           <a:ln>
             <a:noFill/>
@@ -4218,20 +4342,58 @@
       </p:sp>
       <p:sp>
         <p:nvSpPr>
-          <p:cNvPr id="4" name="장식"/>
+          <p:cNvPr id="4" name="하단 라벨"/>
+          <p:cNvSpPr txBox="1"/>
+          <p:nvPr/>
+        </p:nvSpPr>
+        <p:spPr>
+          <a:xfrm>
+            <a:off x="640080" y="6437376"/>
+            <a:ext cx="5486400" cy="274320"/>
+          </a:xfrm>
+          <a:prstGeom prst="rect">
+            <a:avLst/>
+          </a:prstGeom>
+          <a:noFill/>
+        </p:spPr>
+        <p:txBody>
+          <a:bodyPr wrap="square" lIns="54864" rIns="54864" tIns="27432" bIns="27432" anchor="ctr">
+            <a:noAutofit/>
+          </a:bodyPr>
+          <a:lstStyle/>
+          <a:p>
+            <a:pPr algn="l">
+              <a:lnSpc>
+                <a:spcPct val="115000"/>
+              </a:lnSpc>
+            </a:pPr>
+            <a:r>
+              <a:rPr sz="900" b="1" i="0" spc="250">
+                <a:solidFill>
+                  <a:srgbClr val="26231F"/>
+                </a:solidFill>
+              </a:rPr>
+              <a:t>FAMILY ALBUM</a:t>
+            </a:r>
+          </a:p>
+        </p:txBody>
+      </p:sp>
+      <p:sp>
+        <p:nvSpPr>
+          <p:cNvPr id="5" name="포인트"/>
           <p:cNvSpPr/>
           <p:nvPr/>
         </p:nvSpPr>
         <p:spPr>
           <a:xfrm>
-            <a:off x="0" y="6400800"/>
-            <a:ext cx="914400" cy="457200"/>
-          </a:xfrm>
-          <a:prstGeom prst="rtTriangle">
+            <a:off x="11213287" y="6473952"/>
+            <a:ext cx="219456" cy="219456"/>
+          </a:xfrm>
+          <a:prstGeom prst="ellipse">
             <a:avLst/>
           </a:prstGeom>
           <a:solidFill>
-            <a:srgbClr val="9DBF5A"/>
+            <a:srgbClr val="D0ED97"/>
           </a:solidFill>
           <a:ln>
             <a:noFill/>
@@ -4257,8 +4419,8 @@
         </p:nvSpPr>
         <p:spPr>
           <a:xfrm>
-            <a:off x="640080" y="457200"/>
-            <a:ext cx="9722815" cy="868680"/>
+            <a:off x="640080" y="502920"/>
+            <a:ext cx="10911535" cy="914400"/>
           </a:xfrm>
         </p:spPr>
         <p:txBody>
@@ -4275,7 +4437,7 @@
             <a:r>
               <a:rPr sz="3000" b="1" i="0">
                 <a:solidFill>
-                  <a:srgbClr val="526728"/>
+                  <a:srgbClr val="26231F"/>
                 </a:solidFill>
               </a:rPr>
               <a:t>우리 가족 이야기</a:t>
@@ -4285,7 +4447,7 @@
       </p:sp>
       <p:sp>
         <p:nvSpPr>
-          <p:cNvPr id="5" name="타임라인 선"/>
+          <p:cNvPr id="6" name="타임라인 선"/>
           <p:cNvSpPr/>
           <p:nvPr/>
         </p:nvSpPr>
@@ -4298,7 +4460,7 @@
             <a:avLst/>
           </a:prstGeom>
           <a:solidFill>
-            <a:srgbClr val="EBF7D4"/>
+            <a:srgbClr val="ECFAD1"/>
           </a:solidFill>
           <a:ln>
             <a:noFill/>
@@ -4314,7 +4476,7 @@
       </p:sp>
       <p:sp>
         <p:nvSpPr>
-          <p:cNvPr id="6" name="때 1"/>
+          <p:cNvPr id="7" name="때 1"/>
           <p:cNvSpPr/>
           <p:nvPr/>
         </p:nvSpPr>
@@ -4327,7 +4489,7 @@
             <a:avLst/>
           </a:prstGeom>
           <a:solidFill>
-            <a:srgbClr val="9DBF5A"/>
+            <a:srgbClr val="D0ED97"/>
           </a:solidFill>
           <a:ln w="38100">
             <a:solidFill>
@@ -4345,7 +4507,7 @@
       </p:sp>
       <p:sp>
         <p:nvSpPr>
-          <p:cNvPr id="7" name="TextBox 6"/>
+          <p:cNvPr id="8" name="TextBox 7"/>
           <p:cNvSpPr txBox="1"/>
           <p:nvPr/>
         </p:nvSpPr>
@@ -4373,7 +4535,7 @@
             <a:r>
               <a:rPr sz="1600" b="1" i="0">
                 <a:solidFill>
-                  <a:srgbClr val="9DBF5A"/>
+                  <a:srgbClr val="D0ED97"/>
                 </a:solidFill>
               </a:rPr>
               <a:t>가족이 된 날</a:t>
@@ -4383,7 +4545,7 @@
       </p:sp>
       <p:sp>
         <p:nvSpPr>
-          <p:cNvPr id="8" name="TextBox 7"/>
+          <p:cNvPr id="9" name="TextBox 8"/>
           <p:cNvSpPr txBox="1"/>
           <p:nvPr/>
         </p:nvSpPr>
@@ -4411,7 +4573,7 @@
             <a:r>
               <a:rPr sz="1800" b="1" i="0">
                 <a:solidFill>
-                  <a:srgbClr val="526728"/>
+                  <a:srgbClr val="3E4927"/>
                 </a:solidFill>
               </a:rPr>
               <a:t>우리의 시작</a:t>
@@ -4421,7 +4583,7 @@
       </p:sp>
       <p:sp>
         <p:nvSpPr>
-          <p:cNvPr id="9" name="TextBox 8"/>
+          <p:cNvPr id="10" name="TextBox 9"/>
           <p:cNvSpPr txBox="1"/>
           <p:nvPr/>
         </p:nvSpPr>
@@ -4449,7 +4611,7 @@
             <a:r>
               <a:rPr sz="1500" b="0" i="0">
                 <a:solidFill>
-                  <a:srgbClr val="2B2B2B"/>
+                  <a:srgbClr val="26231F"/>
                 </a:solidFill>
               </a:rPr>
               <a:t>처음 만난 날의 이야기</a:t>
@@ -4459,7 +4621,7 @@
       </p:sp>
       <p:sp>
         <p:nvSpPr>
-          <p:cNvPr id="10" name="때 2"/>
+          <p:cNvPr id="11" name="때 2"/>
           <p:cNvSpPr/>
           <p:nvPr/>
         </p:nvSpPr>
@@ -4472,7 +4634,7 @@
             <a:avLst/>
           </a:prstGeom>
           <a:solidFill>
-            <a:srgbClr val="9DBF5A"/>
+            <a:srgbClr val="D0ED97"/>
           </a:solidFill>
           <a:ln w="38100">
             <a:solidFill>
@@ -4490,7 +4652,7 @@
       </p:sp>
       <p:sp>
         <p:nvSpPr>
-          <p:cNvPr id="11" name="TextBox 10"/>
+          <p:cNvPr id="12" name="TextBox 11"/>
           <p:cNvSpPr txBox="1"/>
           <p:nvPr/>
         </p:nvSpPr>
@@ -4518,7 +4680,7 @@
             <a:r>
               <a:rPr sz="1600" b="1" i="0">
                 <a:solidFill>
-                  <a:srgbClr val="9DBF5A"/>
+                  <a:srgbClr val="D0ED97"/>
                 </a:solidFill>
               </a:rPr>
               <a:t>아이가 태어난 날</a:t>
@@ -4528,7 +4690,7 @@
       </p:sp>
       <p:sp>
         <p:nvSpPr>
-          <p:cNvPr id="12" name="TextBox 11"/>
+          <p:cNvPr id="13" name="TextBox 12"/>
           <p:cNvSpPr txBox="1"/>
           <p:nvPr/>
         </p:nvSpPr>
@@ -4556,7 +4718,7 @@
             <a:r>
               <a:rPr sz="1800" b="1" i="0">
                 <a:solidFill>
-                  <a:srgbClr val="526728"/>
+                  <a:srgbClr val="3E4927"/>
                 </a:solidFill>
               </a:rPr>
               <a:t>새 식구</a:t>
@@ -4566,7 +4728,7 @@
       </p:sp>
       <p:sp>
         <p:nvSpPr>
-          <p:cNvPr id="13" name="TextBox 12"/>
+          <p:cNvPr id="14" name="TextBox 13"/>
           <p:cNvSpPr txBox="1"/>
           <p:nvPr/>
         </p:nvSpPr>
@@ -4594,7 +4756,7 @@
             <a:r>
               <a:rPr sz="1500" b="0" i="0">
                 <a:solidFill>
-                  <a:srgbClr val="2B2B2B"/>
+                  <a:srgbClr val="26231F"/>
                 </a:solidFill>
               </a:rPr>
               <a:t>그날의 기억을 적어요</a:t>
@@ -4604,7 +4766,7 @@
       </p:sp>
       <p:sp>
         <p:nvSpPr>
-          <p:cNvPr id="14" name="때 3"/>
+          <p:cNvPr id="15" name="때 3"/>
           <p:cNvSpPr/>
           <p:nvPr/>
         </p:nvSpPr>
@@ -4617,7 +4779,7 @@
             <a:avLst/>
           </a:prstGeom>
           <a:solidFill>
-            <a:srgbClr val="9DBF5A"/>
+            <a:srgbClr val="D0ED97"/>
           </a:solidFill>
           <a:ln w="38100">
             <a:solidFill>
@@ -4635,7 +4797,7 @@
       </p:sp>
       <p:sp>
         <p:nvSpPr>
-          <p:cNvPr id="15" name="TextBox 14"/>
+          <p:cNvPr id="16" name="TextBox 15"/>
           <p:cNvSpPr txBox="1"/>
           <p:nvPr/>
         </p:nvSpPr>
@@ -4663,7 +4825,7 @@
             <a:r>
               <a:rPr sz="1600" b="1" i="0">
                 <a:solidFill>
-                  <a:srgbClr val="9DBF5A"/>
+                  <a:srgbClr val="D0ED97"/>
                 </a:solidFill>
               </a:rPr>
               <a:t>첫 가족 여행</a:t>
@@ -4673,7 +4835,7 @@
       </p:sp>
       <p:sp>
         <p:nvSpPr>
-          <p:cNvPr id="16" name="TextBox 15"/>
+          <p:cNvPr id="17" name="TextBox 16"/>
           <p:cNvSpPr txBox="1"/>
           <p:nvPr/>
         </p:nvSpPr>
@@ -4701,7 +4863,7 @@
             <a:r>
               <a:rPr sz="1800" b="1" i="0">
                 <a:solidFill>
-                  <a:srgbClr val="526728"/>
+                  <a:srgbClr val="3E4927"/>
                 </a:solidFill>
               </a:rPr>
               <a:t>함께 떠난 길</a:t>
@@ -4711,7 +4873,7 @@
       </p:sp>
       <p:sp>
         <p:nvSpPr>
-          <p:cNvPr id="17" name="TextBox 16"/>
+          <p:cNvPr id="18" name="TextBox 17"/>
           <p:cNvSpPr txBox="1"/>
           <p:nvPr/>
         </p:nvSpPr>
@@ -4739,7 +4901,7 @@
             <a:r>
               <a:rPr sz="1500" b="0" i="0">
                 <a:solidFill>
-                  <a:srgbClr val="2B2B2B"/>
+                  <a:srgbClr val="26231F"/>
                 </a:solidFill>
               </a:rPr>
               <a:t>가장 웃었던 순간</a:t>
@@ -4749,7 +4911,7 @@
       </p:sp>
       <p:sp>
         <p:nvSpPr>
-          <p:cNvPr id="18" name="때 4"/>
+          <p:cNvPr id="19" name="때 4"/>
           <p:cNvSpPr/>
           <p:nvPr/>
         </p:nvSpPr>
@@ -4762,7 +4924,7 @@
             <a:avLst/>
           </a:prstGeom>
           <a:solidFill>
-            <a:srgbClr val="9DBF5A"/>
+            <a:srgbClr val="D0ED97"/>
           </a:solidFill>
           <a:ln w="38100">
             <a:solidFill>
@@ -4780,7 +4942,7 @@
       </p:sp>
       <p:sp>
         <p:nvSpPr>
-          <p:cNvPr id="19" name="TextBox 18"/>
+          <p:cNvPr id="20" name="TextBox 19"/>
           <p:cNvSpPr txBox="1"/>
           <p:nvPr/>
         </p:nvSpPr>
@@ -4808,7 +4970,7 @@
             <a:r>
               <a:rPr sz="1600" b="1" i="0">
                 <a:solidFill>
-                  <a:srgbClr val="9DBF5A"/>
+                  <a:srgbClr val="D0ED97"/>
                 </a:solidFill>
               </a:rPr>
               <a:t>지금</a:t>
@@ -4818,7 +4980,7 @@
       </p:sp>
       <p:sp>
         <p:nvSpPr>
-          <p:cNvPr id="20" name="TextBox 19"/>
+          <p:cNvPr id="21" name="TextBox 20"/>
           <p:cNvSpPr txBox="1"/>
           <p:nvPr/>
         </p:nvSpPr>
@@ -4846,7 +5008,7 @@
             <a:r>
               <a:rPr sz="1800" b="1" i="0">
                 <a:solidFill>
-                  <a:srgbClr val="526728"/>
+                  <a:srgbClr val="3E4927"/>
                 </a:solidFill>
               </a:rPr>
               <a:t>오늘의 우리</a:t>
@@ -4856,7 +5018,7 @@
       </p:sp>
       <p:sp>
         <p:nvSpPr>
-          <p:cNvPr id="21" name="TextBox 20"/>
+          <p:cNvPr id="22" name="TextBox 21"/>
           <p:cNvSpPr txBox="1"/>
           <p:nvPr/>
         </p:nvSpPr>
@@ -4884,7 +5046,7 @@
             <a:r>
               <a:rPr sz="1500" b="0" i="0">
                 <a:solidFill>
-                  <a:srgbClr val="2B2B2B"/>
+                  <a:srgbClr val="26231F"/>
                 </a:solidFill>
               </a:rPr>
               <a:t>요즘 우리 이야기</a:t>
@@ -4906,7 +5068,7 @@
     <p:bg>
       <p:bgPr>
         <a:solidFill>
-          <a:srgbClr val="F9FCF3"/>
+          <a:srgbClr val="FCFDFA"/>
         </a:solidFill>
         <a:effectLst/>
       </p:bgPr>
@@ -4926,14 +5088,14 @@
         </p:nvSpPr>
         <p:spPr>
           <a:xfrm>
-            <a:off x="0" y="6035040"/>
-            <a:ext cx="1737360" cy="822960"/>
-          </a:xfrm>
-          <a:prstGeom prst="rtTriangle">
+            <a:off x="640080" y="6400800"/>
+            <a:ext cx="10911535" cy="10972"/>
+          </a:xfrm>
+          <a:prstGeom prst="rect">
             <a:avLst/>
           </a:prstGeom>
           <a:solidFill>
-            <a:srgbClr val="EBF7D4"/>
+            <a:srgbClr val="26231F"/>
           </a:solidFill>
           <a:ln>
             <a:noFill/>
@@ -4949,20 +5111,58 @@
       </p:sp>
       <p:sp>
         <p:nvSpPr>
-          <p:cNvPr id="4" name="장식"/>
+          <p:cNvPr id="4" name="하단 라벨"/>
+          <p:cNvSpPr txBox="1"/>
+          <p:nvPr/>
+        </p:nvSpPr>
+        <p:spPr>
+          <a:xfrm>
+            <a:off x="640080" y="6437376"/>
+            <a:ext cx="5486400" cy="274320"/>
+          </a:xfrm>
+          <a:prstGeom prst="rect">
+            <a:avLst/>
+          </a:prstGeom>
+          <a:noFill/>
+        </p:spPr>
+        <p:txBody>
+          <a:bodyPr wrap="square" lIns="54864" rIns="54864" tIns="27432" bIns="27432" anchor="ctr">
+            <a:noAutofit/>
+          </a:bodyPr>
+          <a:lstStyle/>
+          <a:p>
+            <a:pPr algn="l">
+              <a:lnSpc>
+                <a:spcPct val="115000"/>
+              </a:lnSpc>
+            </a:pPr>
+            <a:r>
+              <a:rPr sz="900" b="1" i="0" spc="250">
+                <a:solidFill>
+                  <a:srgbClr val="26231F"/>
+                </a:solidFill>
+              </a:rPr>
+              <a:t>FAMILY ALBUM</a:t>
+            </a:r>
+          </a:p>
+        </p:txBody>
+      </p:sp>
+      <p:sp>
+        <p:nvSpPr>
+          <p:cNvPr id="5" name="포인트"/>
           <p:cNvSpPr/>
           <p:nvPr/>
         </p:nvSpPr>
         <p:spPr>
           <a:xfrm>
-            <a:off x="0" y="6400800"/>
-            <a:ext cx="914400" cy="457200"/>
-          </a:xfrm>
-          <a:prstGeom prst="rtTriangle">
+            <a:off x="11213287" y="6473952"/>
+            <a:ext cx="219456" cy="219456"/>
+          </a:xfrm>
+          <a:prstGeom prst="ellipse">
             <a:avLst/>
           </a:prstGeom>
           <a:solidFill>
-            <a:srgbClr val="9DBF5A"/>
+            <a:srgbClr val="D0ED97"/>
           </a:solidFill>
           <a:ln>
             <a:noFill/>
@@ -4988,8 +5188,8 @@
         </p:nvSpPr>
         <p:spPr>
           <a:xfrm>
-            <a:off x="640080" y="457200"/>
-            <a:ext cx="9722815" cy="868680"/>
+            <a:off x="640080" y="502920"/>
+            <a:ext cx="10911535" cy="914400"/>
           </a:xfrm>
         </p:spPr>
         <p:txBody>
@@ -5006,7 +5206,7 @@
             <a:r>
               <a:rPr sz="3000" b="1" i="0">
                 <a:solidFill>
-                  <a:srgbClr val="526728"/>
+                  <a:srgbClr val="26231F"/>
                 </a:solidFill>
               </a:rPr>
               <a:t>우리 가족의 약속</a:t>
@@ -5016,7 +5216,7 @@
       </p:sp>
       <p:sp>
         <p:nvSpPr>
-          <p:cNvPr id="5" name="줄 1"/>
+          <p:cNvPr id="6" name="줄 1"/>
           <p:cNvSpPr/>
           <p:nvPr/>
         </p:nvSpPr>
@@ -5027,15 +5227,15 @@
           </a:xfrm>
           <a:prstGeom prst="roundRect">
             <a:avLst>
-              <a:gd name="adj" fmla="val 8000"/>
+              <a:gd name="adj" fmla="val 3000"/>
             </a:avLst>
           </a:prstGeom>
           <a:solidFill>
-            <a:srgbClr val="F9FCF3"/>
+            <a:srgbClr val="FFFFFF"/>
           </a:solidFill>
-          <a:ln w="12700">
+          <a:ln w="9525">
             <a:solidFill>
-              <a:srgbClr val="EBF7D4"/>
+              <a:srgbClr val="ECFAD1"/>
             </a:solidFill>
           </a:ln>
         </p:spPr>
@@ -5049,7 +5249,36 @@
       </p:sp>
       <p:sp>
         <p:nvSpPr>
-          <p:cNvPr id="6" name="번호 1"/>
+          <p:cNvPr id="7" name="위쪽 띠"/>
+          <p:cNvSpPr/>
+          <p:nvPr/>
+        </p:nvSpPr>
+        <p:spPr>
+          <a:xfrm>
+            <a:off x="649224" y="1609344"/>
+            <a:ext cx="10893247" cy="82296"/>
+          </a:xfrm>
+          <a:prstGeom prst="rect">
+            <a:avLst/>
+          </a:prstGeom>
+          <a:solidFill>
+            <a:srgbClr val="D0ED97"/>
+          </a:solidFill>
+          <a:ln>
+            <a:noFill/>
+          </a:ln>
+        </p:spPr>
+        <p:txBody>
+          <a:bodyPr rtlCol="0" anchor="ctr"/>
+          <a:lstStyle/>
+          <a:p>
+            <a:pPr algn="ctr"/>
+          </a:p>
+        </p:txBody>
+      </p:sp>
+      <p:sp>
+        <p:nvSpPr>
+          <p:cNvPr id="8" name="번호 1"/>
           <p:cNvSpPr/>
           <p:nvPr/>
         </p:nvSpPr>
@@ -5058,11 +5287,13 @@
             <a:off x="822959" y="1874519"/>
             <a:ext cx="457200" cy="457200"/>
           </a:xfrm>
-          <a:prstGeom prst="ellipse">
-            <a:avLst/>
+          <a:prstGeom prst="roundRect">
+            <a:avLst>
+              <a:gd name="adj" fmla="val 25000"/>
+            </a:avLst>
           </a:prstGeom>
           <a:solidFill>
-            <a:srgbClr val="9DBF5A"/>
+            <a:srgbClr val="D0ED97"/>
           </a:solidFill>
           <a:ln>
             <a:noFill/>
@@ -5082,7 +5313,7 @@
             <a:r>
               <a:rPr sz="1600" b="1" i="0">
                 <a:solidFill>
-                  <a:srgbClr val="FFFFFF"/>
+                  <a:srgbClr val="26231F"/>
                 </a:solidFill>
               </a:rPr>
               <a:t>1</a:t>
@@ -5092,7 +5323,7 @@
       </p:sp>
       <p:sp>
         <p:nvSpPr>
-          <p:cNvPr id="7" name="TextBox 6"/>
+          <p:cNvPr id="9" name="TextBox 8"/>
           <p:cNvSpPr txBox="1"/>
           <p:nvPr/>
         </p:nvSpPr>
@@ -5120,7 +5351,7 @@
             <a:r>
               <a:rPr sz="1800" b="1" i="0">
                 <a:solidFill>
-                  <a:srgbClr val="526728"/>
+                  <a:srgbClr val="3E4927"/>
                 </a:solidFill>
               </a:rPr>
               <a:t>약속 1</a:t>
@@ -5130,7 +5361,7 @@
       </p:sp>
       <p:sp>
         <p:nvSpPr>
-          <p:cNvPr id="8" name="TextBox 7"/>
+          <p:cNvPr id="10" name="TextBox 9"/>
           <p:cNvSpPr txBox="1"/>
           <p:nvPr/>
         </p:nvSpPr>
@@ -5158,7 +5389,7 @@
             <a:r>
               <a:rPr sz="1700" b="0" i="0">
                 <a:solidFill>
-                  <a:srgbClr val="2B2B2B"/>
+                  <a:srgbClr val="26231F"/>
                 </a:solidFill>
               </a:rPr>
               <a:t>밥은 꼭 함께 먹기</a:t>
@@ -5168,7 +5399,7 @@
       </p:sp>
       <p:sp>
         <p:nvSpPr>
-          <p:cNvPr id="9" name="줄 2"/>
+          <p:cNvPr id="11" name="줄 2"/>
           <p:cNvSpPr/>
           <p:nvPr/>
         </p:nvSpPr>
@@ -5179,15 +5410,15 @@
           </a:xfrm>
           <a:prstGeom prst="roundRect">
             <a:avLst>
-              <a:gd name="adj" fmla="val 8000"/>
+              <a:gd name="adj" fmla="val 3000"/>
             </a:avLst>
           </a:prstGeom>
           <a:solidFill>
-            <a:srgbClr val="F9FCF3"/>
+            <a:srgbClr val="FFFFFF"/>
           </a:solidFill>
-          <a:ln w="12700">
+          <a:ln w="9525">
             <a:solidFill>
-              <a:srgbClr val="EBF7D4"/>
+              <a:srgbClr val="ECFAD1"/>
             </a:solidFill>
           </a:ln>
         </p:spPr>
@@ -5201,7 +5432,36 @@
       </p:sp>
       <p:sp>
         <p:nvSpPr>
-          <p:cNvPr id="10" name="번호 2"/>
+          <p:cNvPr id="12" name="위쪽 띠"/>
+          <p:cNvSpPr/>
+          <p:nvPr/>
+        </p:nvSpPr>
+        <p:spPr>
+          <a:xfrm>
+            <a:off x="649224" y="2752344"/>
+            <a:ext cx="10893247" cy="82296"/>
+          </a:xfrm>
+          <a:prstGeom prst="rect">
+            <a:avLst/>
+          </a:prstGeom>
+          <a:solidFill>
+            <a:srgbClr val="D0ED97"/>
+          </a:solidFill>
+          <a:ln>
+            <a:noFill/>
+          </a:ln>
+        </p:spPr>
+        <p:txBody>
+          <a:bodyPr rtlCol="0" anchor="ctr"/>
+          <a:lstStyle/>
+          <a:p>
+            <a:pPr algn="ctr"/>
+          </a:p>
+        </p:txBody>
+      </p:sp>
+      <p:sp>
+        <p:nvSpPr>
+          <p:cNvPr id="13" name="번호 2"/>
           <p:cNvSpPr/>
           <p:nvPr/>
         </p:nvSpPr>
@@ -5210,11 +5470,13 @@
             <a:off x="822959" y="3017520"/>
             <a:ext cx="457200" cy="457200"/>
           </a:xfrm>
-          <a:prstGeom prst="ellipse">
-            <a:avLst/>
+          <a:prstGeom prst="roundRect">
+            <a:avLst>
+              <a:gd name="adj" fmla="val 25000"/>
+            </a:avLst>
           </a:prstGeom>
           <a:solidFill>
-            <a:srgbClr val="9DBF5A"/>
+            <a:srgbClr val="D0ED97"/>
           </a:solidFill>
           <a:ln>
             <a:noFill/>
@@ -5234,7 +5496,7 @@
             <a:r>
               <a:rPr sz="1600" b="1" i="0">
                 <a:solidFill>
-                  <a:srgbClr val="FFFFFF"/>
+                  <a:srgbClr val="26231F"/>
                 </a:solidFill>
               </a:rPr>
               <a:t>2</a:t>
@@ -5244,7 +5506,7 @@
       </p:sp>
       <p:sp>
         <p:nvSpPr>
-          <p:cNvPr id="11" name="TextBox 10"/>
+          <p:cNvPr id="14" name="TextBox 13"/>
           <p:cNvSpPr txBox="1"/>
           <p:nvPr/>
         </p:nvSpPr>
@@ -5272,7 +5534,7 @@
             <a:r>
               <a:rPr sz="1800" b="1" i="0">
                 <a:solidFill>
-                  <a:srgbClr val="526728"/>
+                  <a:srgbClr val="3E4927"/>
                 </a:solidFill>
               </a:rPr>
               <a:t>약속 2</a:t>
@@ -5282,7 +5544,7 @@
       </p:sp>
       <p:sp>
         <p:nvSpPr>
-          <p:cNvPr id="12" name="TextBox 11"/>
+          <p:cNvPr id="15" name="TextBox 14"/>
           <p:cNvSpPr txBox="1"/>
           <p:nvPr/>
         </p:nvSpPr>
@@ -5310,7 +5572,7 @@
             <a:r>
               <a:rPr sz="1700" b="0" i="0">
                 <a:solidFill>
-                  <a:srgbClr val="2B2B2B"/>
+                  <a:srgbClr val="26231F"/>
                 </a:solidFill>
               </a:rPr>
               <a:t>잠들기 전에 사랑한다고 말하기</a:t>
@@ -5320,7 +5582,7 @@
       </p:sp>
       <p:sp>
         <p:nvSpPr>
-          <p:cNvPr id="13" name="줄 3"/>
+          <p:cNvPr id="16" name="줄 3"/>
           <p:cNvSpPr/>
           <p:nvPr/>
         </p:nvSpPr>
@@ -5331,15 +5593,15 @@
           </a:xfrm>
           <a:prstGeom prst="roundRect">
             <a:avLst>
-              <a:gd name="adj" fmla="val 8000"/>
+              <a:gd name="adj" fmla="val 3000"/>
             </a:avLst>
           </a:prstGeom>
           <a:solidFill>
-            <a:srgbClr val="F9FCF3"/>
+            <a:srgbClr val="FFFFFF"/>
           </a:solidFill>
-          <a:ln w="12700">
+          <a:ln w="9525">
             <a:solidFill>
-              <a:srgbClr val="EBF7D4"/>
+              <a:srgbClr val="ECFAD1"/>
             </a:solidFill>
           </a:ln>
         </p:spPr>
@@ -5353,7 +5615,36 @@
       </p:sp>
       <p:sp>
         <p:nvSpPr>
-          <p:cNvPr id="14" name="번호 3"/>
+          <p:cNvPr id="17" name="위쪽 띠"/>
+          <p:cNvSpPr/>
+          <p:nvPr/>
+        </p:nvSpPr>
+        <p:spPr>
+          <a:xfrm>
+            <a:off x="649224" y="3895344"/>
+            <a:ext cx="10893247" cy="82296"/>
+          </a:xfrm>
+          <a:prstGeom prst="rect">
+            <a:avLst/>
+          </a:prstGeom>
+          <a:solidFill>
+            <a:srgbClr val="D0ED97"/>
+          </a:solidFill>
+          <a:ln>
+            <a:noFill/>
+          </a:ln>
+        </p:spPr>
+        <p:txBody>
+          <a:bodyPr rtlCol="0" anchor="ctr"/>
+          <a:lstStyle/>
+          <a:p>
+            <a:pPr algn="ctr"/>
+          </a:p>
+        </p:txBody>
+      </p:sp>
+      <p:sp>
+        <p:nvSpPr>
+          <p:cNvPr id="18" name="번호 3"/>
           <p:cNvSpPr/>
           <p:nvPr/>
         </p:nvSpPr>
@@ -5362,11 +5653,13 @@
             <a:off x="822959" y="4160520"/>
             <a:ext cx="457200" cy="457200"/>
           </a:xfrm>
-          <a:prstGeom prst="ellipse">
-            <a:avLst/>
+          <a:prstGeom prst="roundRect">
+            <a:avLst>
+              <a:gd name="adj" fmla="val 25000"/>
+            </a:avLst>
           </a:prstGeom>
           <a:solidFill>
-            <a:srgbClr val="9DBF5A"/>
+            <a:srgbClr val="D0ED97"/>
           </a:solidFill>
           <a:ln>
             <a:noFill/>
@@ -5386,7 +5679,7 @@
             <a:r>
               <a:rPr sz="1600" b="1" i="0">
                 <a:solidFill>
-                  <a:srgbClr val="FFFFFF"/>
+                  <a:srgbClr val="26231F"/>
                 </a:solidFill>
               </a:rPr>
               <a:t>3</a:t>
@@ -5396,7 +5689,7 @@
       </p:sp>
       <p:sp>
         <p:nvSpPr>
-          <p:cNvPr id="15" name="TextBox 14"/>
+          <p:cNvPr id="19" name="TextBox 18"/>
           <p:cNvSpPr txBox="1"/>
           <p:nvPr/>
         </p:nvSpPr>
@@ -5424,7 +5717,7 @@
             <a:r>
               <a:rPr sz="1800" b="1" i="0">
                 <a:solidFill>
-                  <a:srgbClr val="526728"/>
+                  <a:srgbClr val="3E4927"/>
                 </a:solidFill>
               </a:rPr>
               <a:t>약속 3</a:t>
@@ -5434,7 +5727,7 @@
       </p:sp>
       <p:sp>
         <p:nvSpPr>
-          <p:cNvPr id="16" name="TextBox 15"/>
+          <p:cNvPr id="20" name="TextBox 19"/>
           <p:cNvSpPr txBox="1"/>
           <p:nvPr/>
         </p:nvSpPr>
@@ -5462,7 +5755,7 @@
             <a:r>
               <a:rPr sz="1700" b="0" i="0">
                 <a:solidFill>
-                  <a:srgbClr val="2B2B2B"/>
+                  <a:srgbClr val="26231F"/>
                 </a:solidFill>
               </a:rPr>
               <a:t>주말에는 함께 산책하기</a:t>
@@ -5484,7 +5777,7 @@
     <p:bg>
       <p:bgPr>
         <a:solidFill>
-          <a:srgbClr val="F9FCF3"/>
+          <a:srgbClr val="FCFDFA"/>
         </a:solidFill>
         <a:effectLst/>
       </p:bgPr>
@@ -5504,14 +5797,14 @@
         </p:nvSpPr>
         <p:spPr>
           <a:xfrm>
-            <a:off x="0" y="6035040"/>
-            <a:ext cx="1737360" cy="822960"/>
-          </a:xfrm>
-          <a:prstGeom prst="rtTriangle">
+            <a:off x="640080" y="6400800"/>
+            <a:ext cx="10911535" cy="10972"/>
+          </a:xfrm>
+          <a:prstGeom prst="rect">
             <a:avLst/>
           </a:prstGeom>
           <a:solidFill>
-            <a:srgbClr val="EBF7D4"/>
+            <a:srgbClr val="26231F"/>
           </a:solidFill>
           <a:ln>
             <a:noFill/>
@@ -5527,20 +5820,58 @@
       </p:sp>
       <p:sp>
         <p:nvSpPr>
-          <p:cNvPr id="4" name="장식"/>
+          <p:cNvPr id="4" name="하단 라벨"/>
+          <p:cNvSpPr txBox="1"/>
+          <p:nvPr/>
+        </p:nvSpPr>
+        <p:spPr>
+          <a:xfrm>
+            <a:off x="640080" y="6437376"/>
+            <a:ext cx="5486400" cy="274320"/>
+          </a:xfrm>
+          <a:prstGeom prst="rect">
+            <a:avLst/>
+          </a:prstGeom>
+          <a:noFill/>
+        </p:spPr>
+        <p:txBody>
+          <a:bodyPr wrap="square" lIns="54864" rIns="54864" tIns="27432" bIns="27432" anchor="ctr">
+            <a:noAutofit/>
+          </a:bodyPr>
+          <a:lstStyle/>
+          <a:p>
+            <a:pPr algn="l">
+              <a:lnSpc>
+                <a:spcPct val="115000"/>
+              </a:lnSpc>
+            </a:pPr>
+            <a:r>
+              <a:rPr sz="900" b="1" i="0" spc="250">
+                <a:solidFill>
+                  <a:srgbClr val="26231F"/>
+                </a:solidFill>
+              </a:rPr>
+              <a:t>FAMILY ALBUM</a:t>
+            </a:r>
+          </a:p>
+        </p:txBody>
+      </p:sp>
+      <p:sp>
+        <p:nvSpPr>
+          <p:cNvPr id="5" name="포인트"/>
           <p:cNvSpPr/>
           <p:nvPr/>
         </p:nvSpPr>
         <p:spPr>
           <a:xfrm>
-            <a:off x="0" y="6400800"/>
-            <a:ext cx="914400" cy="457200"/>
-          </a:xfrm>
-          <a:prstGeom prst="rtTriangle">
+            <a:off x="11213287" y="6473952"/>
+            <a:ext cx="219456" cy="219456"/>
+          </a:xfrm>
+          <a:prstGeom prst="ellipse">
             <a:avLst/>
           </a:prstGeom>
           <a:solidFill>
-            <a:srgbClr val="9DBF5A"/>
+            <a:srgbClr val="D0ED97"/>
           </a:solidFill>
           <a:ln>
             <a:noFill/>
@@ -5566,8 +5897,8 @@
         </p:nvSpPr>
         <p:spPr>
           <a:xfrm>
-            <a:off x="640080" y="457200"/>
-            <a:ext cx="9722815" cy="868680"/>
+            <a:off x="640080" y="502920"/>
+            <a:ext cx="10911535" cy="914400"/>
           </a:xfrm>
         </p:spPr>
         <p:txBody>
@@ -5584,7 +5915,7 @@
             <a:r>
               <a:rPr sz="3000" b="1" i="0">
                 <a:solidFill>
-                  <a:srgbClr val="526728"/>
+                  <a:srgbClr val="26231F"/>
                 </a:solidFill>
               </a:rPr>
               <a:t>가족 사진</a:t>
@@ -5594,14 +5925,14 @@
       </p:sp>
       <p:sp>
         <p:nvSpPr>
-          <p:cNvPr id="5" name="사진 자리"/>
+          <p:cNvPr id="6" name="사진 자리"/>
           <p:cNvSpPr/>
           <p:nvPr/>
         </p:nvSpPr>
         <p:spPr>
           <a:xfrm>
             <a:off x="640080" y="1600200"/>
-            <a:ext cx="3515258" cy="2308860"/>
+            <a:ext cx="3515258" cy="2194560"/>
           </a:xfrm>
           <a:prstGeom prst="roundRect">
             <a:avLst>
@@ -5609,12 +5940,10 @@
             </a:avLst>
           </a:prstGeom>
           <a:solidFill>
-            <a:srgbClr val="EBF7D4"/>
+            <a:srgbClr val="ECFAD1"/>
           </a:solidFill>
           <a:ln w="19050">
-            <a:solidFill>
-              <a:srgbClr val="9DBF5A"/>
-            </a:solidFill>
+            <a:noFill/>
             <a:prstDash val="dash"/>
           </a:ln>
         </p:spPr>
@@ -5632,7 +5961,7 @@
             <a:r>
               <a:rPr sz="1200" b="0" i="0">
                 <a:solidFill>
-                  <a:srgbClr val="526728"/>
+                  <a:srgbClr val="8E8780"/>
                 </a:solidFill>
               </a:rPr>
               <a:t>사진 1</a:t>
@@ -5642,14 +5971,14 @@
       </p:sp>
       <p:sp>
         <p:nvSpPr>
-          <p:cNvPr id="6" name="사진 자리"/>
+          <p:cNvPr id="7" name="사진 자리"/>
           <p:cNvSpPr/>
           <p:nvPr/>
         </p:nvSpPr>
         <p:spPr>
           <a:xfrm>
             <a:off x="4338218" y="1600200"/>
-            <a:ext cx="3515258" cy="2308860"/>
+            <a:ext cx="3515258" cy="2194560"/>
           </a:xfrm>
           <a:prstGeom prst="roundRect">
             <a:avLst>
@@ -5657,12 +5986,10 @@
             </a:avLst>
           </a:prstGeom>
           <a:solidFill>
-            <a:srgbClr val="EBF7D4"/>
+            <a:srgbClr val="ECFAD1"/>
           </a:solidFill>
           <a:ln w="19050">
-            <a:solidFill>
-              <a:srgbClr val="9DBF5A"/>
-            </a:solidFill>
+            <a:noFill/>
             <a:prstDash val="dash"/>
           </a:ln>
         </p:spPr>
@@ -5680,7 +6007,7 @@
             <a:r>
               <a:rPr sz="1200" b="0" i="0">
                 <a:solidFill>
-                  <a:srgbClr val="526728"/>
+                  <a:srgbClr val="8E8780"/>
                 </a:solidFill>
               </a:rPr>
               <a:t>사진 2</a:t>
@@ -5690,14 +6017,14 @@
       </p:sp>
       <p:sp>
         <p:nvSpPr>
-          <p:cNvPr id="7" name="사진 자리"/>
+          <p:cNvPr id="8" name="사진 자리"/>
           <p:cNvSpPr/>
           <p:nvPr/>
         </p:nvSpPr>
         <p:spPr>
           <a:xfrm>
             <a:off x="8036356" y="1600200"/>
-            <a:ext cx="3515258" cy="2308860"/>
+            <a:ext cx="3515258" cy="2194560"/>
           </a:xfrm>
           <a:prstGeom prst="roundRect">
             <a:avLst>
@@ -5705,12 +6032,10 @@
             </a:avLst>
           </a:prstGeom>
           <a:solidFill>
-            <a:srgbClr val="EBF7D4"/>
+            <a:srgbClr val="ECFAD1"/>
           </a:solidFill>
           <a:ln w="19050">
-            <a:solidFill>
-              <a:srgbClr val="9DBF5A"/>
-            </a:solidFill>
+            <a:noFill/>
             <a:prstDash val="dash"/>
           </a:ln>
         </p:spPr>
@@ -5728,7 +6053,7 @@
             <a:r>
               <a:rPr sz="1200" b="0" i="0">
                 <a:solidFill>
-                  <a:srgbClr val="526728"/>
+                  <a:srgbClr val="8E8780"/>
                 </a:solidFill>
               </a:rPr>
               <a:t>사진 3</a:t>
@@ -5738,14 +6063,14 @@
       </p:sp>
       <p:sp>
         <p:nvSpPr>
-          <p:cNvPr id="8" name="사진 자리"/>
+          <p:cNvPr id="9" name="사진 자리"/>
           <p:cNvSpPr/>
           <p:nvPr/>
         </p:nvSpPr>
         <p:spPr>
           <a:xfrm>
-            <a:off x="640080" y="4091939"/>
-            <a:ext cx="3515258" cy="2308860"/>
+            <a:off x="640080" y="3977639"/>
+            <a:ext cx="3515258" cy="2194560"/>
           </a:xfrm>
           <a:prstGeom prst="roundRect">
             <a:avLst>
@@ -5753,12 +6078,10 @@
             </a:avLst>
           </a:prstGeom>
           <a:solidFill>
-            <a:srgbClr val="EBF7D4"/>
+            <a:srgbClr val="ECFAD1"/>
           </a:solidFill>
           <a:ln w="19050">
-            <a:solidFill>
-              <a:srgbClr val="9DBF5A"/>
-            </a:solidFill>
+            <a:noFill/>
             <a:prstDash val="dash"/>
           </a:ln>
         </p:spPr>
@@ -5776,7 +6099,7 @@
             <a:r>
               <a:rPr sz="1200" b="0" i="0">
                 <a:solidFill>
-                  <a:srgbClr val="526728"/>
+                  <a:srgbClr val="8E8780"/>
                 </a:solidFill>
               </a:rPr>
               <a:t>사진 4</a:t>
@@ -5786,14 +6109,14 @@
       </p:sp>
       <p:sp>
         <p:nvSpPr>
-          <p:cNvPr id="9" name="사진 자리"/>
+          <p:cNvPr id="10" name="사진 자리"/>
           <p:cNvSpPr/>
           <p:nvPr/>
         </p:nvSpPr>
         <p:spPr>
           <a:xfrm>
-            <a:off x="4338218" y="4091939"/>
-            <a:ext cx="3515258" cy="2308860"/>
+            <a:off x="4338218" y="3977639"/>
+            <a:ext cx="3515258" cy="2194560"/>
           </a:xfrm>
           <a:prstGeom prst="roundRect">
             <a:avLst>
@@ -5801,12 +6124,10 @@
             </a:avLst>
           </a:prstGeom>
           <a:solidFill>
-            <a:srgbClr val="EBF7D4"/>
+            <a:srgbClr val="ECFAD1"/>
           </a:solidFill>
           <a:ln w="19050">
-            <a:solidFill>
-              <a:srgbClr val="9DBF5A"/>
-            </a:solidFill>
+            <a:noFill/>
             <a:prstDash val="dash"/>
           </a:ln>
         </p:spPr>
@@ -5824,7 +6145,7 @@
             <a:r>
               <a:rPr sz="1200" b="0" i="0">
                 <a:solidFill>
-                  <a:srgbClr val="526728"/>
+                  <a:srgbClr val="8E8780"/>
                 </a:solidFill>
               </a:rPr>
               <a:t>사진 5</a:t>
@@ -5834,14 +6155,14 @@
       </p:sp>
       <p:sp>
         <p:nvSpPr>
-          <p:cNvPr id="10" name="사진 자리"/>
+          <p:cNvPr id="11" name="사진 자리"/>
           <p:cNvSpPr/>
           <p:nvPr/>
         </p:nvSpPr>
         <p:spPr>
           <a:xfrm>
-            <a:off x="8036356" y="4091939"/>
-            <a:ext cx="3515258" cy="2308860"/>
+            <a:off x="8036356" y="3977639"/>
+            <a:ext cx="3515258" cy="2194560"/>
           </a:xfrm>
           <a:prstGeom prst="roundRect">
             <a:avLst>
@@ -5849,12 +6170,10 @@
             </a:avLst>
           </a:prstGeom>
           <a:solidFill>
-            <a:srgbClr val="EBF7D4"/>
+            <a:srgbClr val="ECFAD1"/>
           </a:solidFill>
           <a:ln w="19050">
-            <a:solidFill>
-              <a:srgbClr val="9DBF5A"/>
-            </a:solidFill>
+            <a:noFill/>
             <a:prstDash val="dash"/>
           </a:ln>
         </p:spPr>
@@ -5872,7 +6191,7 @@
             <a:r>
               <a:rPr sz="1200" b="0" i="0">
                 <a:solidFill>
-                  <a:srgbClr val="526728"/>
+                  <a:srgbClr val="8E8780"/>
                 </a:solidFill>
               </a:rPr>
               <a:t>사진 6</a:t>
@@ -5891,6 +6210,14 @@
 <file path=ppt/slides/slide6.xml><?xml version="1.0" encoding="utf-8"?>
 <p:sld xmlns:a="http://schemas.openxmlformats.org/drawingml/2006/main" xmlns:p="http://schemas.openxmlformats.org/presentationml/2006/main" xmlns:r="http://schemas.openxmlformats.org/officeDocument/2006/relationships">
   <p:cSld>
+    <p:bg>
+      <p:bgPr>
+        <a:solidFill>
+          <a:srgbClr val="F7FDEA"/>
+        </a:solidFill>
+        <a:effectLst/>
+      </p:bgPr>
+    </p:bg>
     <p:spTree>
       <p:nvGrpSpPr>
         <p:cNvPr id="1" name=""/>
@@ -5898,30 +6225,116 @@
         <p:nvPr/>
       </p:nvGrpSpPr>
       <p:grpSpPr/>
-      <p:pic>
-        <p:nvPicPr>
-          <p:cNvPr id="3" name="표지 그림" descr="family-12.jpg"/>
-          <p:cNvPicPr>
-            <a:picLocks noChangeAspect="1"/>
-          </p:cNvPicPr>
-          <p:nvPr/>
-        </p:nvPicPr>
-        <p:blipFill>
-          <a:blip r:embed="rId2"/>
-          <a:stretch>
-            <a:fillRect/>
-          </a:stretch>
-        </p:blipFill>
-        <p:spPr>
-          <a:xfrm>
-            <a:off x="0" y="0"/>
-            <a:ext cx="12191695" cy="6858000"/>
+      <p:sp>
+        <p:nvSpPr>
+          <p:cNvPr id="3" name="사진 자리"/>
+          <p:cNvSpPr/>
+          <p:nvPr/>
+        </p:nvSpPr>
+        <p:spPr>
+          <a:xfrm>
+            <a:off x="7802684" y="0"/>
+            <a:ext cx="4389010" cy="6858000"/>
           </a:xfrm>
           <a:prstGeom prst="rect">
             <a:avLst/>
           </a:prstGeom>
-        </p:spPr>
-      </p:pic>
+          <a:solidFill>
+            <a:srgbClr val="D9F2A6"/>
+          </a:solidFill>
+          <a:ln>
+            <a:noFill/>
+          </a:ln>
+        </p:spPr>
+        <p:txBody>
+          <a:bodyPr rtlCol="0" anchor="ctr" wrap="square" lIns="54864" rIns="54864" tIns="27432" bIns="27432">
+            <a:noAutofit/>
+          </a:bodyPr>
+          <a:lstStyle/>
+          <a:p>
+            <a:pPr algn="ctr">
+              <a:lnSpc>
+                <a:spcPct val="100000"/>
+              </a:lnSpc>
+            </a:pPr>
+            <a:r>
+              <a:rPr sz="1400" b="0" i="0">
+                <a:solidFill>
+                  <a:srgbClr val="3E4927"/>
+                </a:solidFill>
+              </a:rPr>
+              <a:t>사진을 넣어 주세요</a:t>
+            </a:r>
+          </a:p>
+        </p:txBody>
+      </p:sp>
+      <p:sp>
+        <p:nvSpPr>
+          <p:cNvPr id="4" name="장식"/>
+          <p:cNvSpPr/>
+          <p:nvPr/>
+        </p:nvSpPr>
+        <p:spPr>
+          <a:xfrm>
+            <a:off x="8168435" y="365760"/>
+            <a:ext cx="3657508" cy="6126480"/>
+          </a:xfrm>
+          <a:prstGeom prst="rect">
+            <a:avLst/>
+          </a:prstGeom>
+          <a:noFill/>
+          <a:ln w="9525">
+            <a:solidFill>
+              <a:srgbClr val="26231F"/>
+            </a:solidFill>
+          </a:ln>
+        </p:spPr>
+        <p:txBody>
+          <a:bodyPr rtlCol="0" anchor="ctr"/>
+          <a:lstStyle/>
+          <a:p>
+            <a:pPr algn="ctr"/>
+          </a:p>
+        </p:txBody>
+      </p:sp>
+      <p:sp>
+        <p:nvSpPr>
+          <p:cNvPr id="5" name="라벨"/>
+          <p:cNvSpPr txBox="1"/>
+          <p:nvPr/>
+        </p:nvSpPr>
+        <p:spPr>
+          <a:xfrm>
+            <a:off x="822960" y="2148840"/>
+            <a:ext cx="5608179" cy="274320"/>
+          </a:xfrm>
+          <a:prstGeom prst="rect">
+            <a:avLst/>
+          </a:prstGeom>
+          <a:noFill/>
+        </p:spPr>
+        <p:txBody>
+          <a:bodyPr wrap="square" lIns="54864" rIns="54864" tIns="27432" bIns="27432" anchor="t">
+            <a:noAutofit/>
+          </a:bodyPr>
+          <a:lstStyle/>
+          <a:p>
+            <a:pPr algn="l">
+              <a:lnSpc>
+                <a:spcPct val="115000"/>
+              </a:lnSpc>
+            </a:pPr>
+            <a:r>
+              <a:rPr sz="1000" b="1" i="0" spc="250">
+                <a:solidFill>
+                  <a:srgbClr val="26231F"/>
+                </a:solidFill>
+              </a:rPr>
+              <a:t>FAMILY ALBUM</a:t>
+            </a:r>
+          </a:p>
+        </p:txBody>
+      </p:sp>
       <p:sp>
         <p:nvSpPr>
           <p:cNvPr id="2" name="Title 1"/>
@@ -5934,8 +6347,8 @@
         </p:nvSpPr>
         <p:spPr>
           <a:xfrm>
-            <a:off x="853418" y="2057400"/>
-            <a:ext cx="6095847" cy="1554480"/>
+            <a:off x="822960" y="2606040"/>
+            <a:ext cx="5608179" cy="1188720"/>
           </a:xfrm>
         </p:spPr>
         <p:txBody>
@@ -5950,9 +6363,9 @@
               </a:lnSpc>
             </a:pPr>
             <a:r>
-              <a:rPr sz="3600" b="1" i="0">
-                <a:solidFill>
-                  <a:srgbClr val="526728"/>
+              <a:rPr sz="4000" b="1" i="0">
+                <a:solidFill>
+                  <a:srgbClr val="26231F"/>
                 </a:solidFill>
               </a:rPr>
               <a:t>우리 가족 소개를 마칩니다</a:t>
@@ -5962,14 +6375,14 @@
       </p:sp>
       <p:sp>
         <p:nvSpPr>
-          <p:cNvPr id="4" name="한 줄 문구"/>
+          <p:cNvPr id="6" name="한 줄 문구"/>
           <p:cNvSpPr txBox="1"/>
           <p:nvPr/>
         </p:nvSpPr>
         <p:spPr>
           <a:xfrm>
-            <a:off x="853418" y="3749039"/>
-            <a:ext cx="6095847" cy="822960"/>
+            <a:off x="822960" y="3886200"/>
+            <a:ext cx="5608179" cy="822960"/>
           </a:xfrm>
           <a:prstGeom prst="rect">
             <a:avLst/>
@@ -5988,9 +6401,9 @@
               </a:lnSpc>
             </a:pPr>
             <a:r>
-              <a:rPr sz="1700" b="0" i="1">
-                <a:solidFill>
-                  <a:srgbClr val="526728"/>
+              <a:rPr sz="1700" b="0" i="0">
+                <a:solidFill>
+                  <a:srgbClr val="26231F"/>
                 </a:solidFill>
               </a:rPr>
               <a:t>읽어 주셔서 고맙습니다</a:t>
@@ -6000,14 +6413,14 @@
       </p:sp>
       <p:sp>
         <p:nvSpPr>
-          <p:cNvPr id="5" name="안내 문구"/>
+          <p:cNvPr id="7" name="안내 문구"/>
           <p:cNvSpPr txBox="1"/>
           <p:nvPr/>
         </p:nvSpPr>
         <p:spPr>
           <a:xfrm>
-            <a:off x="853418" y="4617720"/>
-            <a:ext cx="6095847" cy="914400"/>
+            <a:off x="822960" y="4754880"/>
+            <a:ext cx="5608179" cy="914400"/>
           </a:xfrm>
           <a:prstGeom prst="rect">
             <a:avLst/>
@@ -6028,7 +6441,7 @@
             <a:r>
               <a:rPr sz="1400" b="0" i="0">
                 <a:solidFill>
-                  <a:srgbClr val="666666"/>
+                  <a:srgbClr val="26231F"/>
                 </a:solidFill>
               </a:rPr>
               <a:t>고맙습니다 · 가족 이름</a:t>
@@ -6055,34 +6468,34 @@
         <a:sysClr val="window" lastClr="FFFFFF"/>
       </a:lt1>
       <a:dk2>
-        <a:srgbClr val="526728"/>
+        <a:srgbClr val="3E4927"/>
       </a:dk2>
       <a:lt2>
-        <a:srgbClr val="F9FCF3"/>
+        <a:srgbClr val="F7FDEA"/>
       </a:lt2>
       <a:accent1>
-        <a:srgbClr val="9DBF5A"/>
+        <a:srgbClr val="D0ED97"/>
       </a:accent1>
       <a:accent2>
-        <a:srgbClr val="339941"/>
+        <a:srgbClr val="C5F3BA"/>
       </a:accent2>
       <a:accent3>
-        <a:srgbClr val="526728"/>
+        <a:srgbClr val="3E4927"/>
       </a:accent3>
       <a:accent4>
-        <a:srgbClr val="EBF7D4"/>
+        <a:srgbClr val="ECFAD1"/>
       </a:accent4>
       <a:accent5>
-        <a:srgbClr val="68AC4E"/>
+        <a:srgbClr val="CAF0A8"/>
       </a:accent5>
       <a:accent6>
-        <a:srgbClr val="97A47E"/>
+        <a:srgbClr val="8B927D"/>
       </a:accent6>
       <a:hlink>
-        <a:srgbClr val="9DBF5A"/>
+        <a:srgbClr val="D0ED97"/>
       </a:hlink>
       <a:folHlink>
-        <a:srgbClr val="526728"/>
+        <a:srgbClr val="3E4927"/>
       </a:folHlink>
     </a:clrScheme>
     <a:fontScheme name="Office">
